--- a/cosonganh.pptx
+++ b/cosonganh.pptx
@@ -1,33 +1,34 @@
 
 <file path=ppt/presentation.xml><?xml version="1.0" encoding="utf-8"?>
-<p:presentation xmlns:a="http://schemas.openxmlformats.org/drawingml/2006/main" xmlns:r="http://schemas.openxmlformats.org/officeDocument/2006/relationships" xmlns:p="http://schemas.openxmlformats.org/presentationml/2006/main" saveSubsetFonts="1">
+<p:presentation xmlns:a="http://schemas.openxmlformats.org/drawingml/2006/main" xmlns:r="http://schemas.openxmlformats.org/officeDocument/2006/relationships" xmlns:p="http://schemas.openxmlformats.org/presentationml/2006/main">
   <p:sldMasterIdLst>
     <p:sldMasterId id="2147483648" r:id="rId1"/>
   </p:sldMasterIdLst>
   <p:sldIdLst>
-    <p:sldId id="256" r:id="rId2"/>
-    <p:sldId id="272" r:id="rId3"/>
-    <p:sldId id="258" r:id="rId4"/>
-    <p:sldId id="259" r:id="rId5"/>
-    <p:sldId id="271" r:id="rId6"/>
-    <p:sldId id="260" r:id="rId7"/>
-    <p:sldId id="261" r:id="rId8"/>
-    <p:sldId id="262" r:id="rId9"/>
-    <p:sldId id="270" r:id="rId10"/>
-    <p:sldId id="273" r:id="rId11"/>
-    <p:sldId id="263" r:id="rId12"/>
-    <p:sldId id="264" r:id="rId13"/>
-    <p:sldId id="265" r:id="rId14"/>
-    <p:sldId id="266" r:id="rId15"/>
-    <p:sldId id="267" r:id="rId16"/>
-    <p:sldId id="274" r:id="rId17"/>
-    <p:sldId id="268" r:id="rId18"/>
-    <p:sldId id="275" r:id="rId19"/>
-    <p:sldId id="276" r:id="rId20"/>
-    <p:sldId id="277" r:id="rId21"/>
-    <p:sldId id="278" r:id="rId22"/>
-    <p:sldId id="279" r:id="rId23"/>
-    <p:sldId id="280" r:id="rId24"/>
+    <p:sldId id="256" r:id="rId3"/>
+    <p:sldId id="272" r:id="rId4"/>
+    <p:sldId id="258" r:id="rId5"/>
+    <p:sldId id="259" r:id="rId6"/>
+    <p:sldId id="271" r:id="rId7"/>
+    <p:sldId id="260" r:id="rId8"/>
+    <p:sldId id="261" r:id="rId9"/>
+    <p:sldId id="262" r:id="rId10"/>
+    <p:sldId id="270" r:id="rId11"/>
+    <p:sldId id="273" r:id="rId12"/>
+    <p:sldId id="263" r:id="rId13"/>
+    <p:sldId id="264" r:id="rId14"/>
+    <p:sldId id="265" r:id="rId15"/>
+    <p:sldId id="266" r:id="rId16"/>
+    <p:sldId id="267" r:id="rId17"/>
+    <p:sldId id="274" r:id="rId18"/>
+    <p:sldId id="268" r:id="rId19"/>
+    <p:sldId id="275" r:id="rId20"/>
+    <p:sldId id="276" r:id="rId21"/>
+    <p:sldId id="277" r:id="rId22"/>
+    <p:sldId id="278" r:id="rId23"/>
+    <p:sldId id="279" r:id="rId24"/>
+    <p:sldId id="280" r:id="rId25"/>
+    <p:sldId id="281" r:id="rId26"/>
   </p:sldIdLst>
   <p:sldSz cx="12192000" cy="6858000"/>
   <p:notesSz cx="6858000" cy="9144000"/>
@@ -148,13 +149,7 @@
       </p:grpSpPr>
       <p:sp>
         <p:nvSpPr>
-          <p:cNvPr id="2" name="Title 1">
-            <a:extLst>
-              <a:ext uri="{FF2B5EF4-FFF2-40B4-BE49-F238E27FC236}">
-                <a16:creationId xmlns:a16="http://schemas.microsoft.com/office/drawing/2014/main" id="{3E9F2365-D689-FCAD-4287-C4CCF126EFC6}"/>
-              </a:ext>
-            </a:extLst>
-          </p:cNvPr>
+          <p:cNvPr id="2" name="Title 1"/>
           <p:cNvSpPr>
             <a:spLocks noGrp="1"/>
           </p:cNvSpPr>
@@ -180,18 +175,13 @@
               <a:rPr lang="en-US"/>
               <a:t>Click to edit Master title style</a:t>
             </a:r>
+            <a:endParaRPr lang="en-US"/>
           </a:p>
         </p:txBody>
       </p:sp>
       <p:sp>
         <p:nvSpPr>
-          <p:cNvPr id="3" name="Subtitle 2">
-            <a:extLst>
-              <a:ext uri="{FF2B5EF4-FFF2-40B4-BE49-F238E27FC236}">
-                <a16:creationId xmlns:a16="http://schemas.microsoft.com/office/drawing/2014/main" id="{08B131B1-F42D-A405-56A6-DF170CE8C72F}"/>
-              </a:ext>
-            </a:extLst>
-          </p:cNvPr>
+          <p:cNvPr id="3" name="Subtitle 2"/>
           <p:cNvSpPr>
             <a:spLocks noGrp="1"/>
           </p:cNvSpPr>
@@ -250,18 +240,13 @@
               <a:rPr lang="en-US"/>
               <a:t>Click to edit Master subtitle style</a:t>
             </a:r>
+            <a:endParaRPr lang="en-US"/>
           </a:p>
         </p:txBody>
       </p:sp>
       <p:sp>
         <p:nvSpPr>
-          <p:cNvPr id="4" name="Date Placeholder 3">
-            <a:extLst>
-              <a:ext uri="{FF2B5EF4-FFF2-40B4-BE49-F238E27FC236}">
-                <a16:creationId xmlns:a16="http://schemas.microsoft.com/office/drawing/2014/main" id="{B5F4E3CF-4392-A684-824D-92ED48C7D3C9}"/>
-              </a:ext>
-            </a:extLst>
-          </p:cNvPr>
+          <p:cNvPr id="4" name="Date Placeholder 3"/>
           <p:cNvSpPr>
             <a:spLocks noGrp="1"/>
           </p:cNvSpPr>
@@ -276,7 +261,6 @@
           <a:p>
             <a:fld id="{C5D0233E-43A8-4870-9DEC-1C669C6C5E88}" type="datetimeFigureOut">
               <a:rPr lang="en-US" smtClean="0"/>
-              <a:t>1/9/2026</a:t>
             </a:fld>
             <a:endParaRPr lang="en-US"/>
           </a:p>
@@ -284,13 +268,7 @@
       </p:sp>
       <p:sp>
         <p:nvSpPr>
-          <p:cNvPr id="5" name="Footer Placeholder 4">
-            <a:extLst>
-              <a:ext uri="{FF2B5EF4-FFF2-40B4-BE49-F238E27FC236}">
-                <a16:creationId xmlns:a16="http://schemas.microsoft.com/office/drawing/2014/main" id="{0B4540AA-4217-4EE8-6079-E2D237E093CB}"/>
-              </a:ext>
-            </a:extLst>
-          </p:cNvPr>
+          <p:cNvPr id="5" name="Footer Placeholder 4"/>
           <p:cNvSpPr>
             <a:spLocks noGrp="1"/>
           </p:cNvSpPr>
@@ -309,13 +287,7 @@
       </p:sp>
       <p:sp>
         <p:nvSpPr>
-          <p:cNvPr id="6" name="Slide Number Placeholder 5">
-            <a:extLst>
-              <a:ext uri="{FF2B5EF4-FFF2-40B4-BE49-F238E27FC236}">
-                <a16:creationId xmlns:a16="http://schemas.microsoft.com/office/drawing/2014/main" id="{2A271DD4-54FE-41BA-B6FA-6CBACC9E8E78}"/>
-              </a:ext>
-            </a:extLst>
-          </p:cNvPr>
+          <p:cNvPr id="6" name="Slide Number Placeholder 5"/>
           <p:cNvSpPr>
             <a:spLocks noGrp="1"/>
           </p:cNvSpPr>
@@ -330,18 +302,12 @@
           <a:p>
             <a:fld id="{A4B1EAC5-66A7-4060-B82C-0A16C00808C0}" type="slidenum">
               <a:rPr lang="en-US" smtClean="0"/>
-              <a:t>‹#›</a:t>
             </a:fld>
             <a:endParaRPr lang="en-US"/>
           </a:p>
         </p:txBody>
       </p:sp>
     </p:spTree>
-    <p:extLst>
-      <p:ext uri="{BB962C8B-B14F-4D97-AF65-F5344CB8AC3E}">
-        <p14:creationId xmlns:p14="http://schemas.microsoft.com/office/powerpoint/2010/main" val="1864572108"/>
-      </p:ext>
-    </p:extLst>
   </p:cSld>
   <p:clrMapOvr>
     <a:masterClrMapping/>
@@ -368,13 +334,7 @@
       </p:grpSpPr>
       <p:sp>
         <p:nvSpPr>
-          <p:cNvPr id="2" name="Title 1">
-            <a:extLst>
-              <a:ext uri="{FF2B5EF4-FFF2-40B4-BE49-F238E27FC236}">
-                <a16:creationId xmlns:a16="http://schemas.microsoft.com/office/drawing/2014/main" id="{063A7725-D79D-F72F-3A4A-4242D84E8261}"/>
-              </a:ext>
-            </a:extLst>
-          </p:cNvPr>
+          <p:cNvPr id="2" name="Title 1"/>
           <p:cNvSpPr>
             <a:spLocks noGrp="1"/>
           </p:cNvSpPr>
@@ -391,18 +351,13 @@
               <a:rPr lang="en-US"/>
               <a:t>Click to edit Master title style</a:t>
             </a:r>
+            <a:endParaRPr lang="en-US"/>
           </a:p>
         </p:txBody>
       </p:sp>
       <p:sp>
         <p:nvSpPr>
-          <p:cNvPr id="3" name="Vertical Text Placeholder 2">
-            <a:extLst>
-              <a:ext uri="{FF2B5EF4-FFF2-40B4-BE49-F238E27FC236}">
-                <a16:creationId xmlns:a16="http://schemas.microsoft.com/office/drawing/2014/main" id="{9659952D-20A4-5211-7E4F-EB301DF7FFEC}"/>
-              </a:ext>
-            </a:extLst>
-          </p:cNvPr>
+          <p:cNvPr id="3" name="Vertical Text Placeholder 2"/>
           <p:cNvSpPr>
             <a:spLocks noGrp="1"/>
           </p:cNvSpPr>
@@ -420,6 +375,7 @@
               <a:rPr lang="en-US"/>
               <a:t>Click to edit Master text styles</a:t>
             </a:r>
+            <a:endParaRPr lang="en-US"/>
           </a:p>
           <a:p>
             <a:pPr lvl="1"/>
@@ -427,6 +383,7 @@
               <a:rPr lang="en-US"/>
               <a:t>Second level</a:t>
             </a:r>
+            <a:endParaRPr lang="en-US"/>
           </a:p>
           <a:p>
             <a:pPr lvl="2"/>
@@ -434,6 +391,7 @@
               <a:rPr lang="en-US"/>
               <a:t>Third level</a:t>
             </a:r>
+            <a:endParaRPr lang="en-US"/>
           </a:p>
           <a:p>
             <a:pPr lvl="3"/>
@@ -441,6 +399,7 @@
               <a:rPr lang="en-US"/>
               <a:t>Fourth level</a:t>
             </a:r>
+            <a:endParaRPr lang="en-US"/>
           </a:p>
           <a:p>
             <a:pPr lvl="4"/>
@@ -448,18 +407,13 @@
               <a:rPr lang="en-US"/>
               <a:t>Fifth level</a:t>
             </a:r>
+            <a:endParaRPr lang="en-US"/>
           </a:p>
         </p:txBody>
       </p:sp>
       <p:sp>
         <p:nvSpPr>
-          <p:cNvPr id="4" name="Date Placeholder 3">
-            <a:extLst>
-              <a:ext uri="{FF2B5EF4-FFF2-40B4-BE49-F238E27FC236}">
-                <a16:creationId xmlns:a16="http://schemas.microsoft.com/office/drawing/2014/main" id="{52FF8BFD-6C01-63A3-26A5-7506390A05CB}"/>
-              </a:ext>
-            </a:extLst>
-          </p:cNvPr>
+          <p:cNvPr id="4" name="Date Placeholder 3"/>
           <p:cNvSpPr>
             <a:spLocks noGrp="1"/>
           </p:cNvSpPr>
@@ -474,7 +428,6 @@
           <a:p>
             <a:fld id="{C5D0233E-43A8-4870-9DEC-1C669C6C5E88}" type="datetimeFigureOut">
               <a:rPr lang="en-US" smtClean="0"/>
-              <a:t>1/9/2026</a:t>
             </a:fld>
             <a:endParaRPr lang="en-US"/>
           </a:p>
@@ -482,13 +435,7 @@
       </p:sp>
       <p:sp>
         <p:nvSpPr>
-          <p:cNvPr id="5" name="Footer Placeholder 4">
-            <a:extLst>
-              <a:ext uri="{FF2B5EF4-FFF2-40B4-BE49-F238E27FC236}">
-                <a16:creationId xmlns:a16="http://schemas.microsoft.com/office/drawing/2014/main" id="{6AAA4162-1A90-93D3-946A-80C3A11806CC}"/>
-              </a:ext>
-            </a:extLst>
-          </p:cNvPr>
+          <p:cNvPr id="5" name="Footer Placeholder 4"/>
           <p:cNvSpPr>
             <a:spLocks noGrp="1"/>
           </p:cNvSpPr>
@@ -507,13 +454,7 @@
       </p:sp>
       <p:sp>
         <p:nvSpPr>
-          <p:cNvPr id="6" name="Slide Number Placeholder 5">
-            <a:extLst>
-              <a:ext uri="{FF2B5EF4-FFF2-40B4-BE49-F238E27FC236}">
-                <a16:creationId xmlns:a16="http://schemas.microsoft.com/office/drawing/2014/main" id="{8542BD8B-7BDE-6756-A2D5-B73924C1E00A}"/>
-              </a:ext>
-            </a:extLst>
-          </p:cNvPr>
+          <p:cNvPr id="6" name="Slide Number Placeholder 5"/>
           <p:cNvSpPr>
             <a:spLocks noGrp="1"/>
           </p:cNvSpPr>
@@ -528,18 +469,12 @@
           <a:p>
             <a:fld id="{A4B1EAC5-66A7-4060-B82C-0A16C00808C0}" type="slidenum">
               <a:rPr lang="en-US" smtClean="0"/>
-              <a:t>‹#›</a:t>
             </a:fld>
             <a:endParaRPr lang="en-US"/>
           </a:p>
         </p:txBody>
       </p:sp>
     </p:spTree>
-    <p:extLst>
-      <p:ext uri="{BB962C8B-B14F-4D97-AF65-F5344CB8AC3E}">
-        <p14:creationId xmlns:p14="http://schemas.microsoft.com/office/powerpoint/2010/main" val="2511645671"/>
-      </p:ext>
-    </p:extLst>
   </p:cSld>
   <p:clrMapOvr>
     <a:masterClrMapping/>
@@ -566,13 +501,7 @@
       </p:grpSpPr>
       <p:sp>
         <p:nvSpPr>
-          <p:cNvPr id="2" name="Vertical Title 1">
-            <a:extLst>
-              <a:ext uri="{FF2B5EF4-FFF2-40B4-BE49-F238E27FC236}">
-                <a16:creationId xmlns:a16="http://schemas.microsoft.com/office/drawing/2014/main" id="{05698B77-BFAD-AD30-19C0-6B859DE3AF83}"/>
-              </a:ext>
-            </a:extLst>
-          </p:cNvPr>
+          <p:cNvPr id="2" name="Vertical Title 1"/>
           <p:cNvSpPr>
             <a:spLocks noGrp="1"/>
           </p:cNvSpPr>
@@ -594,18 +523,13 @@
               <a:rPr lang="en-US"/>
               <a:t>Click to edit Master title style</a:t>
             </a:r>
+            <a:endParaRPr lang="en-US"/>
           </a:p>
         </p:txBody>
       </p:sp>
       <p:sp>
         <p:nvSpPr>
-          <p:cNvPr id="3" name="Vertical Text Placeholder 2">
-            <a:extLst>
-              <a:ext uri="{FF2B5EF4-FFF2-40B4-BE49-F238E27FC236}">
-                <a16:creationId xmlns:a16="http://schemas.microsoft.com/office/drawing/2014/main" id="{634CFC44-78CC-AACA-BCDF-792481AFB17E}"/>
-              </a:ext>
-            </a:extLst>
-          </p:cNvPr>
+          <p:cNvPr id="3" name="Vertical Text Placeholder 2"/>
           <p:cNvSpPr>
             <a:spLocks noGrp="1"/>
           </p:cNvSpPr>
@@ -628,6 +552,7 @@
               <a:rPr lang="en-US"/>
               <a:t>Click to edit Master text styles</a:t>
             </a:r>
+            <a:endParaRPr lang="en-US"/>
           </a:p>
           <a:p>
             <a:pPr lvl="1"/>
@@ -635,6 +560,7 @@
               <a:rPr lang="en-US"/>
               <a:t>Second level</a:t>
             </a:r>
+            <a:endParaRPr lang="en-US"/>
           </a:p>
           <a:p>
             <a:pPr lvl="2"/>
@@ -642,6 +568,7 @@
               <a:rPr lang="en-US"/>
               <a:t>Third level</a:t>
             </a:r>
+            <a:endParaRPr lang="en-US"/>
           </a:p>
           <a:p>
             <a:pPr lvl="3"/>
@@ -649,6 +576,7 @@
               <a:rPr lang="en-US"/>
               <a:t>Fourth level</a:t>
             </a:r>
+            <a:endParaRPr lang="en-US"/>
           </a:p>
           <a:p>
             <a:pPr lvl="4"/>
@@ -656,18 +584,13 @@
               <a:rPr lang="en-US"/>
               <a:t>Fifth level</a:t>
             </a:r>
+            <a:endParaRPr lang="en-US"/>
           </a:p>
         </p:txBody>
       </p:sp>
       <p:sp>
         <p:nvSpPr>
-          <p:cNvPr id="4" name="Date Placeholder 3">
-            <a:extLst>
-              <a:ext uri="{FF2B5EF4-FFF2-40B4-BE49-F238E27FC236}">
-                <a16:creationId xmlns:a16="http://schemas.microsoft.com/office/drawing/2014/main" id="{00785034-DE73-B40A-137A-F670CCC6A736}"/>
-              </a:ext>
-            </a:extLst>
-          </p:cNvPr>
+          <p:cNvPr id="4" name="Date Placeholder 3"/>
           <p:cNvSpPr>
             <a:spLocks noGrp="1"/>
           </p:cNvSpPr>
@@ -682,7 +605,6 @@
           <a:p>
             <a:fld id="{C5D0233E-43A8-4870-9DEC-1C669C6C5E88}" type="datetimeFigureOut">
               <a:rPr lang="en-US" smtClean="0"/>
-              <a:t>1/9/2026</a:t>
             </a:fld>
             <a:endParaRPr lang="en-US"/>
           </a:p>
@@ -690,13 +612,7 @@
       </p:sp>
       <p:sp>
         <p:nvSpPr>
-          <p:cNvPr id="5" name="Footer Placeholder 4">
-            <a:extLst>
-              <a:ext uri="{FF2B5EF4-FFF2-40B4-BE49-F238E27FC236}">
-                <a16:creationId xmlns:a16="http://schemas.microsoft.com/office/drawing/2014/main" id="{2F56F938-4197-9597-A65E-EFC8C1406ABC}"/>
-              </a:ext>
-            </a:extLst>
-          </p:cNvPr>
+          <p:cNvPr id="5" name="Footer Placeholder 4"/>
           <p:cNvSpPr>
             <a:spLocks noGrp="1"/>
           </p:cNvSpPr>
@@ -715,13 +631,7 @@
       </p:sp>
       <p:sp>
         <p:nvSpPr>
-          <p:cNvPr id="6" name="Slide Number Placeholder 5">
-            <a:extLst>
-              <a:ext uri="{FF2B5EF4-FFF2-40B4-BE49-F238E27FC236}">
-                <a16:creationId xmlns:a16="http://schemas.microsoft.com/office/drawing/2014/main" id="{1301D822-2881-06B1-4C5A-9B04BD3EABFD}"/>
-              </a:ext>
-            </a:extLst>
-          </p:cNvPr>
+          <p:cNvPr id="6" name="Slide Number Placeholder 5"/>
           <p:cNvSpPr>
             <a:spLocks noGrp="1"/>
           </p:cNvSpPr>
@@ -736,18 +646,12 @@
           <a:p>
             <a:fld id="{A4B1EAC5-66A7-4060-B82C-0A16C00808C0}" type="slidenum">
               <a:rPr lang="en-US" smtClean="0"/>
-              <a:t>‹#›</a:t>
             </a:fld>
             <a:endParaRPr lang="en-US"/>
           </a:p>
         </p:txBody>
       </p:sp>
     </p:spTree>
-    <p:extLst>
-      <p:ext uri="{BB962C8B-B14F-4D97-AF65-F5344CB8AC3E}">
-        <p14:creationId xmlns:p14="http://schemas.microsoft.com/office/powerpoint/2010/main" val="2818413276"/>
-      </p:ext>
-    </p:extLst>
   </p:cSld>
   <p:clrMapOvr>
     <a:masterClrMapping/>
@@ -774,13 +678,7 @@
       </p:grpSpPr>
       <p:sp>
         <p:nvSpPr>
-          <p:cNvPr id="2" name="Title 1">
-            <a:extLst>
-              <a:ext uri="{FF2B5EF4-FFF2-40B4-BE49-F238E27FC236}">
-                <a16:creationId xmlns:a16="http://schemas.microsoft.com/office/drawing/2014/main" id="{98437372-C8B1-F81A-56EA-99F2A7C09858}"/>
-              </a:ext>
-            </a:extLst>
-          </p:cNvPr>
+          <p:cNvPr id="2" name="Title 1"/>
           <p:cNvSpPr>
             <a:spLocks noGrp="1"/>
           </p:cNvSpPr>
@@ -797,18 +695,13 @@
               <a:rPr lang="en-US"/>
               <a:t>Click to edit Master title style</a:t>
             </a:r>
+            <a:endParaRPr lang="en-US"/>
           </a:p>
         </p:txBody>
       </p:sp>
       <p:sp>
         <p:nvSpPr>
-          <p:cNvPr id="3" name="Content Placeholder 2">
-            <a:extLst>
-              <a:ext uri="{FF2B5EF4-FFF2-40B4-BE49-F238E27FC236}">
-                <a16:creationId xmlns:a16="http://schemas.microsoft.com/office/drawing/2014/main" id="{D4E2EA8D-C0EF-26EF-4DF5-850D0717BDF6}"/>
-              </a:ext>
-            </a:extLst>
-          </p:cNvPr>
+          <p:cNvPr id="3" name="Content Placeholder 2"/>
           <p:cNvSpPr>
             <a:spLocks noGrp="1"/>
           </p:cNvSpPr>
@@ -826,6 +719,7 @@
               <a:rPr lang="en-US"/>
               <a:t>Click to edit Master text styles</a:t>
             </a:r>
+            <a:endParaRPr lang="en-US"/>
           </a:p>
           <a:p>
             <a:pPr lvl="1"/>
@@ -833,6 +727,7 @@
               <a:rPr lang="en-US"/>
               <a:t>Second level</a:t>
             </a:r>
+            <a:endParaRPr lang="en-US"/>
           </a:p>
           <a:p>
             <a:pPr lvl="2"/>
@@ -840,6 +735,7 @@
               <a:rPr lang="en-US"/>
               <a:t>Third level</a:t>
             </a:r>
+            <a:endParaRPr lang="en-US"/>
           </a:p>
           <a:p>
             <a:pPr lvl="3"/>
@@ -847,6 +743,7 @@
               <a:rPr lang="en-US"/>
               <a:t>Fourth level</a:t>
             </a:r>
+            <a:endParaRPr lang="en-US"/>
           </a:p>
           <a:p>
             <a:pPr lvl="4"/>
@@ -854,18 +751,13 @@
               <a:rPr lang="en-US"/>
               <a:t>Fifth level</a:t>
             </a:r>
+            <a:endParaRPr lang="en-US"/>
           </a:p>
         </p:txBody>
       </p:sp>
       <p:sp>
         <p:nvSpPr>
-          <p:cNvPr id="4" name="Date Placeholder 3">
-            <a:extLst>
-              <a:ext uri="{FF2B5EF4-FFF2-40B4-BE49-F238E27FC236}">
-                <a16:creationId xmlns:a16="http://schemas.microsoft.com/office/drawing/2014/main" id="{0B777C9F-DD17-1ED9-250E-0BA71C9961ED}"/>
-              </a:ext>
-            </a:extLst>
-          </p:cNvPr>
+          <p:cNvPr id="4" name="Date Placeholder 3"/>
           <p:cNvSpPr>
             <a:spLocks noGrp="1"/>
           </p:cNvSpPr>
@@ -880,7 +772,6 @@
           <a:p>
             <a:fld id="{C5D0233E-43A8-4870-9DEC-1C669C6C5E88}" type="datetimeFigureOut">
               <a:rPr lang="en-US" smtClean="0"/>
-              <a:t>1/9/2026</a:t>
             </a:fld>
             <a:endParaRPr lang="en-US"/>
           </a:p>
@@ -888,13 +779,7 @@
       </p:sp>
       <p:sp>
         <p:nvSpPr>
-          <p:cNvPr id="5" name="Footer Placeholder 4">
-            <a:extLst>
-              <a:ext uri="{FF2B5EF4-FFF2-40B4-BE49-F238E27FC236}">
-                <a16:creationId xmlns:a16="http://schemas.microsoft.com/office/drawing/2014/main" id="{E421EB76-E1FC-137F-F226-DAA5AC5FDCC3}"/>
-              </a:ext>
-            </a:extLst>
-          </p:cNvPr>
+          <p:cNvPr id="5" name="Footer Placeholder 4"/>
           <p:cNvSpPr>
             <a:spLocks noGrp="1"/>
           </p:cNvSpPr>
@@ -913,13 +798,7 @@
       </p:sp>
       <p:sp>
         <p:nvSpPr>
-          <p:cNvPr id="6" name="Slide Number Placeholder 5">
-            <a:extLst>
-              <a:ext uri="{FF2B5EF4-FFF2-40B4-BE49-F238E27FC236}">
-                <a16:creationId xmlns:a16="http://schemas.microsoft.com/office/drawing/2014/main" id="{E0896C39-9BD4-A62F-C57C-8500E2E49D35}"/>
-              </a:ext>
-            </a:extLst>
-          </p:cNvPr>
+          <p:cNvPr id="6" name="Slide Number Placeholder 5"/>
           <p:cNvSpPr>
             <a:spLocks noGrp="1"/>
           </p:cNvSpPr>
@@ -934,18 +813,12 @@
           <a:p>
             <a:fld id="{A4B1EAC5-66A7-4060-B82C-0A16C00808C0}" type="slidenum">
               <a:rPr lang="en-US" smtClean="0"/>
-              <a:t>‹#›</a:t>
             </a:fld>
             <a:endParaRPr lang="en-US"/>
           </a:p>
         </p:txBody>
       </p:sp>
     </p:spTree>
-    <p:extLst>
-      <p:ext uri="{BB962C8B-B14F-4D97-AF65-F5344CB8AC3E}">
-        <p14:creationId xmlns:p14="http://schemas.microsoft.com/office/powerpoint/2010/main" val="1082631685"/>
-      </p:ext>
-    </p:extLst>
   </p:cSld>
   <p:clrMapOvr>
     <a:masterClrMapping/>
@@ -972,13 +845,7 @@
       </p:grpSpPr>
       <p:sp>
         <p:nvSpPr>
-          <p:cNvPr id="2" name="Title 1">
-            <a:extLst>
-              <a:ext uri="{FF2B5EF4-FFF2-40B4-BE49-F238E27FC236}">
-                <a16:creationId xmlns:a16="http://schemas.microsoft.com/office/drawing/2014/main" id="{DD542C11-753A-E6A2-79AE-989E81906AE9}"/>
-              </a:ext>
-            </a:extLst>
-          </p:cNvPr>
+          <p:cNvPr id="2" name="Title 1"/>
           <p:cNvSpPr>
             <a:spLocks noGrp="1"/>
           </p:cNvSpPr>
@@ -1004,18 +871,13 @@
               <a:rPr lang="en-US"/>
               <a:t>Click to edit Master title style</a:t>
             </a:r>
+            <a:endParaRPr lang="en-US"/>
           </a:p>
         </p:txBody>
       </p:sp>
       <p:sp>
         <p:nvSpPr>
-          <p:cNvPr id="3" name="Text Placeholder 2">
-            <a:extLst>
-              <a:ext uri="{FF2B5EF4-FFF2-40B4-BE49-F238E27FC236}">
-                <a16:creationId xmlns:a16="http://schemas.microsoft.com/office/drawing/2014/main" id="{B979F7D3-A6AF-E965-E855-BD233B094C90}"/>
-              </a:ext>
-            </a:extLst>
-          </p:cNvPr>
+          <p:cNvPr id="3" name="Text Placeholder 2"/>
           <p:cNvSpPr>
             <a:spLocks noGrp="1"/>
           </p:cNvSpPr>
@@ -1129,18 +991,13 @@
               <a:rPr lang="en-US"/>
               <a:t>Click to edit Master text styles</a:t>
             </a:r>
+            <a:endParaRPr lang="en-US"/>
           </a:p>
         </p:txBody>
       </p:sp>
       <p:sp>
         <p:nvSpPr>
-          <p:cNvPr id="4" name="Date Placeholder 3">
-            <a:extLst>
-              <a:ext uri="{FF2B5EF4-FFF2-40B4-BE49-F238E27FC236}">
-                <a16:creationId xmlns:a16="http://schemas.microsoft.com/office/drawing/2014/main" id="{DE603C7D-7510-8E2C-0AC1-7B2D62FA37A5}"/>
-              </a:ext>
-            </a:extLst>
-          </p:cNvPr>
+          <p:cNvPr id="4" name="Date Placeholder 3"/>
           <p:cNvSpPr>
             <a:spLocks noGrp="1"/>
           </p:cNvSpPr>
@@ -1155,7 +1012,6 @@
           <a:p>
             <a:fld id="{C5D0233E-43A8-4870-9DEC-1C669C6C5E88}" type="datetimeFigureOut">
               <a:rPr lang="en-US" smtClean="0"/>
-              <a:t>1/9/2026</a:t>
             </a:fld>
             <a:endParaRPr lang="en-US"/>
           </a:p>
@@ -1163,13 +1019,7 @@
       </p:sp>
       <p:sp>
         <p:nvSpPr>
-          <p:cNvPr id="5" name="Footer Placeholder 4">
-            <a:extLst>
-              <a:ext uri="{FF2B5EF4-FFF2-40B4-BE49-F238E27FC236}">
-                <a16:creationId xmlns:a16="http://schemas.microsoft.com/office/drawing/2014/main" id="{46965365-4204-10DE-57BC-ED53DB844D76}"/>
-              </a:ext>
-            </a:extLst>
-          </p:cNvPr>
+          <p:cNvPr id="5" name="Footer Placeholder 4"/>
           <p:cNvSpPr>
             <a:spLocks noGrp="1"/>
           </p:cNvSpPr>
@@ -1188,13 +1038,7 @@
       </p:sp>
       <p:sp>
         <p:nvSpPr>
-          <p:cNvPr id="6" name="Slide Number Placeholder 5">
-            <a:extLst>
-              <a:ext uri="{FF2B5EF4-FFF2-40B4-BE49-F238E27FC236}">
-                <a16:creationId xmlns:a16="http://schemas.microsoft.com/office/drawing/2014/main" id="{4E3309FB-E9EB-8D1E-BDB0-AABBE58BB6F5}"/>
-              </a:ext>
-            </a:extLst>
-          </p:cNvPr>
+          <p:cNvPr id="6" name="Slide Number Placeholder 5"/>
           <p:cNvSpPr>
             <a:spLocks noGrp="1"/>
           </p:cNvSpPr>
@@ -1209,18 +1053,12 @@
           <a:p>
             <a:fld id="{A4B1EAC5-66A7-4060-B82C-0A16C00808C0}" type="slidenum">
               <a:rPr lang="en-US" smtClean="0"/>
-              <a:t>‹#›</a:t>
             </a:fld>
             <a:endParaRPr lang="en-US"/>
           </a:p>
         </p:txBody>
       </p:sp>
     </p:spTree>
-    <p:extLst>
-      <p:ext uri="{BB962C8B-B14F-4D97-AF65-F5344CB8AC3E}">
-        <p14:creationId xmlns:p14="http://schemas.microsoft.com/office/powerpoint/2010/main" val="3299227478"/>
-      </p:ext>
-    </p:extLst>
   </p:cSld>
   <p:clrMapOvr>
     <a:masterClrMapping/>
@@ -1247,13 +1085,7 @@
       </p:grpSpPr>
       <p:sp>
         <p:nvSpPr>
-          <p:cNvPr id="2" name="Title 1">
-            <a:extLst>
-              <a:ext uri="{FF2B5EF4-FFF2-40B4-BE49-F238E27FC236}">
-                <a16:creationId xmlns:a16="http://schemas.microsoft.com/office/drawing/2014/main" id="{ED931683-7A7F-4C4E-0536-3E3AE4A933D5}"/>
-              </a:ext>
-            </a:extLst>
-          </p:cNvPr>
+          <p:cNvPr id="2" name="Title 1"/>
           <p:cNvSpPr>
             <a:spLocks noGrp="1"/>
           </p:cNvSpPr>
@@ -1270,18 +1102,13 @@
               <a:rPr lang="en-US"/>
               <a:t>Click to edit Master title style</a:t>
             </a:r>
+            <a:endParaRPr lang="en-US"/>
           </a:p>
         </p:txBody>
       </p:sp>
       <p:sp>
         <p:nvSpPr>
-          <p:cNvPr id="3" name="Content Placeholder 2">
-            <a:extLst>
-              <a:ext uri="{FF2B5EF4-FFF2-40B4-BE49-F238E27FC236}">
-                <a16:creationId xmlns:a16="http://schemas.microsoft.com/office/drawing/2014/main" id="{A522766D-CBFA-7EF6-04D4-E514CC56C8F1}"/>
-              </a:ext>
-            </a:extLst>
-          </p:cNvPr>
+          <p:cNvPr id="3" name="Content Placeholder 2"/>
           <p:cNvSpPr>
             <a:spLocks noGrp="1"/>
           </p:cNvSpPr>
@@ -1304,6 +1131,7 @@
               <a:rPr lang="en-US"/>
               <a:t>Click to edit Master text styles</a:t>
             </a:r>
+            <a:endParaRPr lang="en-US"/>
           </a:p>
           <a:p>
             <a:pPr lvl="1"/>
@@ -1311,6 +1139,7 @@
               <a:rPr lang="en-US"/>
               <a:t>Second level</a:t>
             </a:r>
+            <a:endParaRPr lang="en-US"/>
           </a:p>
           <a:p>
             <a:pPr lvl="2"/>
@@ -1318,6 +1147,7 @@
               <a:rPr lang="en-US"/>
               <a:t>Third level</a:t>
             </a:r>
+            <a:endParaRPr lang="en-US"/>
           </a:p>
           <a:p>
             <a:pPr lvl="3"/>
@@ -1325,6 +1155,7 @@
               <a:rPr lang="en-US"/>
               <a:t>Fourth level</a:t>
             </a:r>
+            <a:endParaRPr lang="en-US"/>
           </a:p>
           <a:p>
             <a:pPr lvl="4"/>
@@ -1332,18 +1163,13 @@
               <a:rPr lang="en-US"/>
               <a:t>Fifth level</a:t>
             </a:r>
+            <a:endParaRPr lang="en-US"/>
           </a:p>
         </p:txBody>
       </p:sp>
       <p:sp>
         <p:nvSpPr>
-          <p:cNvPr id="4" name="Content Placeholder 3">
-            <a:extLst>
-              <a:ext uri="{FF2B5EF4-FFF2-40B4-BE49-F238E27FC236}">
-                <a16:creationId xmlns:a16="http://schemas.microsoft.com/office/drawing/2014/main" id="{C097A73F-89CB-C584-C27D-BF59016CFD39}"/>
-              </a:ext>
-            </a:extLst>
-          </p:cNvPr>
+          <p:cNvPr id="4" name="Content Placeholder 3"/>
           <p:cNvSpPr>
             <a:spLocks noGrp="1"/>
           </p:cNvSpPr>
@@ -1366,6 +1192,7 @@
               <a:rPr lang="en-US"/>
               <a:t>Click to edit Master text styles</a:t>
             </a:r>
+            <a:endParaRPr lang="en-US"/>
           </a:p>
           <a:p>
             <a:pPr lvl="1"/>
@@ -1373,6 +1200,7 @@
               <a:rPr lang="en-US"/>
               <a:t>Second level</a:t>
             </a:r>
+            <a:endParaRPr lang="en-US"/>
           </a:p>
           <a:p>
             <a:pPr lvl="2"/>
@@ -1380,6 +1208,7 @@
               <a:rPr lang="en-US"/>
               <a:t>Third level</a:t>
             </a:r>
+            <a:endParaRPr lang="en-US"/>
           </a:p>
           <a:p>
             <a:pPr lvl="3"/>
@@ -1387,6 +1216,7 @@
               <a:rPr lang="en-US"/>
               <a:t>Fourth level</a:t>
             </a:r>
+            <a:endParaRPr lang="en-US"/>
           </a:p>
           <a:p>
             <a:pPr lvl="4"/>
@@ -1394,18 +1224,13 @@
               <a:rPr lang="en-US"/>
               <a:t>Fifth level</a:t>
             </a:r>
+            <a:endParaRPr lang="en-US"/>
           </a:p>
         </p:txBody>
       </p:sp>
       <p:sp>
         <p:nvSpPr>
-          <p:cNvPr id="5" name="Date Placeholder 4">
-            <a:extLst>
-              <a:ext uri="{FF2B5EF4-FFF2-40B4-BE49-F238E27FC236}">
-                <a16:creationId xmlns:a16="http://schemas.microsoft.com/office/drawing/2014/main" id="{FD17E818-E297-A272-0528-7DF90F6CE2E3}"/>
-              </a:ext>
-            </a:extLst>
-          </p:cNvPr>
+          <p:cNvPr id="5" name="Date Placeholder 4"/>
           <p:cNvSpPr>
             <a:spLocks noGrp="1"/>
           </p:cNvSpPr>
@@ -1420,7 +1245,6 @@
           <a:p>
             <a:fld id="{C5D0233E-43A8-4870-9DEC-1C669C6C5E88}" type="datetimeFigureOut">
               <a:rPr lang="en-US" smtClean="0"/>
-              <a:t>1/9/2026</a:t>
             </a:fld>
             <a:endParaRPr lang="en-US"/>
           </a:p>
@@ -1428,13 +1252,7 @@
       </p:sp>
       <p:sp>
         <p:nvSpPr>
-          <p:cNvPr id="6" name="Footer Placeholder 5">
-            <a:extLst>
-              <a:ext uri="{FF2B5EF4-FFF2-40B4-BE49-F238E27FC236}">
-                <a16:creationId xmlns:a16="http://schemas.microsoft.com/office/drawing/2014/main" id="{346C3850-E15E-F86E-0834-1645222747C3}"/>
-              </a:ext>
-            </a:extLst>
-          </p:cNvPr>
+          <p:cNvPr id="6" name="Footer Placeholder 5"/>
           <p:cNvSpPr>
             <a:spLocks noGrp="1"/>
           </p:cNvSpPr>
@@ -1453,13 +1271,7 @@
       </p:sp>
       <p:sp>
         <p:nvSpPr>
-          <p:cNvPr id="7" name="Slide Number Placeholder 6">
-            <a:extLst>
-              <a:ext uri="{FF2B5EF4-FFF2-40B4-BE49-F238E27FC236}">
-                <a16:creationId xmlns:a16="http://schemas.microsoft.com/office/drawing/2014/main" id="{AF565599-8366-378A-4155-52FBE722E767}"/>
-              </a:ext>
-            </a:extLst>
-          </p:cNvPr>
+          <p:cNvPr id="7" name="Slide Number Placeholder 6"/>
           <p:cNvSpPr>
             <a:spLocks noGrp="1"/>
           </p:cNvSpPr>
@@ -1474,18 +1286,12 @@
           <a:p>
             <a:fld id="{A4B1EAC5-66A7-4060-B82C-0A16C00808C0}" type="slidenum">
               <a:rPr lang="en-US" smtClean="0"/>
-              <a:t>‹#›</a:t>
             </a:fld>
             <a:endParaRPr lang="en-US"/>
           </a:p>
         </p:txBody>
       </p:sp>
     </p:spTree>
-    <p:extLst>
-      <p:ext uri="{BB962C8B-B14F-4D97-AF65-F5344CB8AC3E}">
-        <p14:creationId xmlns:p14="http://schemas.microsoft.com/office/powerpoint/2010/main" val="1445753383"/>
-      </p:ext>
-    </p:extLst>
   </p:cSld>
   <p:clrMapOvr>
     <a:masterClrMapping/>
@@ -1512,13 +1318,7 @@
       </p:grpSpPr>
       <p:sp>
         <p:nvSpPr>
-          <p:cNvPr id="2" name="Title 1">
-            <a:extLst>
-              <a:ext uri="{FF2B5EF4-FFF2-40B4-BE49-F238E27FC236}">
-                <a16:creationId xmlns:a16="http://schemas.microsoft.com/office/drawing/2014/main" id="{785576F6-D7D1-7917-F153-3EF135025FA0}"/>
-              </a:ext>
-            </a:extLst>
-          </p:cNvPr>
+          <p:cNvPr id="2" name="Title 1"/>
           <p:cNvSpPr>
             <a:spLocks noGrp="1"/>
           </p:cNvSpPr>
@@ -1540,18 +1340,13 @@
               <a:rPr lang="en-US"/>
               <a:t>Click to edit Master title style</a:t>
             </a:r>
+            <a:endParaRPr lang="en-US"/>
           </a:p>
         </p:txBody>
       </p:sp>
       <p:sp>
         <p:nvSpPr>
-          <p:cNvPr id="3" name="Text Placeholder 2">
-            <a:extLst>
-              <a:ext uri="{FF2B5EF4-FFF2-40B4-BE49-F238E27FC236}">
-                <a16:creationId xmlns:a16="http://schemas.microsoft.com/office/drawing/2014/main" id="{7EA7CBD7-AEA6-6D21-02DE-F7D905F5D752}"/>
-              </a:ext>
-            </a:extLst>
-          </p:cNvPr>
+          <p:cNvPr id="3" name="Text Placeholder 2"/>
           <p:cNvSpPr>
             <a:spLocks noGrp="1"/>
           </p:cNvSpPr>
@@ -1611,18 +1406,13 @@
               <a:rPr lang="en-US"/>
               <a:t>Click to edit Master text styles</a:t>
             </a:r>
+            <a:endParaRPr lang="en-US"/>
           </a:p>
         </p:txBody>
       </p:sp>
       <p:sp>
         <p:nvSpPr>
-          <p:cNvPr id="4" name="Content Placeholder 3">
-            <a:extLst>
-              <a:ext uri="{FF2B5EF4-FFF2-40B4-BE49-F238E27FC236}">
-                <a16:creationId xmlns:a16="http://schemas.microsoft.com/office/drawing/2014/main" id="{84F4E1A7-646A-2A0D-66D5-A5976734BE98}"/>
-              </a:ext>
-            </a:extLst>
-          </p:cNvPr>
+          <p:cNvPr id="4" name="Content Placeholder 3"/>
           <p:cNvSpPr>
             <a:spLocks noGrp="1"/>
           </p:cNvSpPr>
@@ -1645,6 +1435,7 @@
               <a:rPr lang="en-US"/>
               <a:t>Click to edit Master text styles</a:t>
             </a:r>
+            <a:endParaRPr lang="en-US"/>
           </a:p>
           <a:p>
             <a:pPr lvl="1"/>
@@ -1652,6 +1443,7 @@
               <a:rPr lang="en-US"/>
               <a:t>Second level</a:t>
             </a:r>
+            <a:endParaRPr lang="en-US"/>
           </a:p>
           <a:p>
             <a:pPr lvl="2"/>
@@ -1659,6 +1451,7 @@
               <a:rPr lang="en-US"/>
               <a:t>Third level</a:t>
             </a:r>
+            <a:endParaRPr lang="en-US"/>
           </a:p>
           <a:p>
             <a:pPr lvl="3"/>
@@ -1666,6 +1459,7 @@
               <a:rPr lang="en-US"/>
               <a:t>Fourth level</a:t>
             </a:r>
+            <a:endParaRPr lang="en-US"/>
           </a:p>
           <a:p>
             <a:pPr lvl="4"/>
@@ -1673,18 +1467,13 @@
               <a:rPr lang="en-US"/>
               <a:t>Fifth level</a:t>
             </a:r>
+            <a:endParaRPr lang="en-US"/>
           </a:p>
         </p:txBody>
       </p:sp>
       <p:sp>
         <p:nvSpPr>
-          <p:cNvPr id="5" name="Text Placeholder 4">
-            <a:extLst>
-              <a:ext uri="{FF2B5EF4-FFF2-40B4-BE49-F238E27FC236}">
-                <a16:creationId xmlns:a16="http://schemas.microsoft.com/office/drawing/2014/main" id="{EBCE30D8-9149-BF9C-B6E1-5C42BC41CD34}"/>
-              </a:ext>
-            </a:extLst>
-          </p:cNvPr>
+          <p:cNvPr id="5" name="Text Placeholder 4"/>
           <p:cNvSpPr>
             <a:spLocks noGrp="1"/>
           </p:cNvSpPr>
@@ -1744,18 +1533,13 @@
               <a:rPr lang="en-US"/>
               <a:t>Click to edit Master text styles</a:t>
             </a:r>
+            <a:endParaRPr lang="en-US"/>
           </a:p>
         </p:txBody>
       </p:sp>
       <p:sp>
         <p:nvSpPr>
-          <p:cNvPr id="6" name="Content Placeholder 5">
-            <a:extLst>
-              <a:ext uri="{FF2B5EF4-FFF2-40B4-BE49-F238E27FC236}">
-                <a16:creationId xmlns:a16="http://schemas.microsoft.com/office/drawing/2014/main" id="{7F8332E5-16F7-D77A-0166-A81AFF0FE0D1}"/>
-              </a:ext>
-            </a:extLst>
-          </p:cNvPr>
+          <p:cNvPr id="6" name="Content Placeholder 5"/>
           <p:cNvSpPr>
             <a:spLocks noGrp="1"/>
           </p:cNvSpPr>
@@ -1778,6 +1562,7 @@
               <a:rPr lang="en-US"/>
               <a:t>Click to edit Master text styles</a:t>
             </a:r>
+            <a:endParaRPr lang="en-US"/>
           </a:p>
           <a:p>
             <a:pPr lvl="1"/>
@@ -1785,6 +1570,7 @@
               <a:rPr lang="en-US"/>
               <a:t>Second level</a:t>
             </a:r>
+            <a:endParaRPr lang="en-US"/>
           </a:p>
           <a:p>
             <a:pPr lvl="2"/>
@@ -1792,6 +1578,7 @@
               <a:rPr lang="en-US"/>
               <a:t>Third level</a:t>
             </a:r>
+            <a:endParaRPr lang="en-US"/>
           </a:p>
           <a:p>
             <a:pPr lvl="3"/>
@@ -1799,6 +1586,7 @@
               <a:rPr lang="en-US"/>
               <a:t>Fourth level</a:t>
             </a:r>
+            <a:endParaRPr lang="en-US"/>
           </a:p>
           <a:p>
             <a:pPr lvl="4"/>
@@ -1806,18 +1594,13 @@
               <a:rPr lang="en-US"/>
               <a:t>Fifth level</a:t>
             </a:r>
+            <a:endParaRPr lang="en-US"/>
           </a:p>
         </p:txBody>
       </p:sp>
       <p:sp>
         <p:nvSpPr>
-          <p:cNvPr id="7" name="Date Placeholder 6">
-            <a:extLst>
-              <a:ext uri="{FF2B5EF4-FFF2-40B4-BE49-F238E27FC236}">
-                <a16:creationId xmlns:a16="http://schemas.microsoft.com/office/drawing/2014/main" id="{7B3093CC-CCEA-F602-A037-55D54A40A549}"/>
-              </a:ext>
-            </a:extLst>
-          </p:cNvPr>
+          <p:cNvPr id="7" name="Date Placeholder 6"/>
           <p:cNvSpPr>
             <a:spLocks noGrp="1"/>
           </p:cNvSpPr>
@@ -1832,7 +1615,6 @@
           <a:p>
             <a:fld id="{C5D0233E-43A8-4870-9DEC-1C669C6C5E88}" type="datetimeFigureOut">
               <a:rPr lang="en-US" smtClean="0"/>
-              <a:t>1/9/2026</a:t>
             </a:fld>
             <a:endParaRPr lang="en-US"/>
           </a:p>
@@ -1840,13 +1622,7 @@
       </p:sp>
       <p:sp>
         <p:nvSpPr>
-          <p:cNvPr id="8" name="Footer Placeholder 7">
-            <a:extLst>
-              <a:ext uri="{FF2B5EF4-FFF2-40B4-BE49-F238E27FC236}">
-                <a16:creationId xmlns:a16="http://schemas.microsoft.com/office/drawing/2014/main" id="{EBE0F9F5-677C-26A0-6817-E5F637DDC1A9}"/>
-              </a:ext>
-            </a:extLst>
-          </p:cNvPr>
+          <p:cNvPr id="8" name="Footer Placeholder 7"/>
           <p:cNvSpPr>
             <a:spLocks noGrp="1"/>
           </p:cNvSpPr>
@@ -1865,13 +1641,7 @@
       </p:sp>
       <p:sp>
         <p:nvSpPr>
-          <p:cNvPr id="9" name="Slide Number Placeholder 8">
-            <a:extLst>
-              <a:ext uri="{FF2B5EF4-FFF2-40B4-BE49-F238E27FC236}">
-                <a16:creationId xmlns:a16="http://schemas.microsoft.com/office/drawing/2014/main" id="{7843266C-9410-6983-0ED6-7DAC69F9D434}"/>
-              </a:ext>
-            </a:extLst>
-          </p:cNvPr>
+          <p:cNvPr id="9" name="Slide Number Placeholder 8"/>
           <p:cNvSpPr>
             <a:spLocks noGrp="1"/>
           </p:cNvSpPr>
@@ -1886,18 +1656,12 @@
           <a:p>
             <a:fld id="{A4B1EAC5-66A7-4060-B82C-0A16C00808C0}" type="slidenum">
               <a:rPr lang="en-US" smtClean="0"/>
-              <a:t>‹#›</a:t>
             </a:fld>
             <a:endParaRPr lang="en-US"/>
           </a:p>
         </p:txBody>
       </p:sp>
     </p:spTree>
-    <p:extLst>
-      <p:ext uri="{BB962C8B-B14F-4D97-AF65-F5344CB8AC3E}">
-        <p14:creationId xmlns:p14="http://schemas.microsoft.com/office/powerpoint/2010/main" val="4135025950"/>
-      </p:ext>
-    </p:extLst>
   </p:cSld>
   <p:clrMapOvr>
     <a:masterClrMapping/>
@@ -1924,13 +1688,7 @@
       </p:grpSpPr>
       <p:sp>
         <p:nvSpPr>
-          <p:cNvPr id="2" name="Title 1">
-            <a:extLst>
-              <a:ext uri="{FF2B5EF4-FFF2-40B4-BE49-F238E27FC236}">
-                <a16:creationId xmlns:a16="http://schemas.microsoft.com/office/drawing/2014/main" id="{80360F41-BDFA-36F6-5CBB-B1461D85566B}"/>
-              </a:ext>
-            </a:extLst>
-          </p:cNvPr>
+          <p:cNvPr id="2" name="Title 1"/>
           <p:cNvSpPr>
             <a:spLocks noGrp="1"/>
           </p:cNvSpPr>
@@ -1947,18 +1705,13 @@
               <a:rPr lang="en-US"/>
               <a:t>Click to edit Master title style</a:t>
             </a:r>
+            <a:endParaRPr lang="en-US"/>
           </a:p>
         </p:txBody>
       </p:sp>
       <p:sp>
         <p:nvSpPr>
-          <p:cNvPr id="3" name="Date Placeholder 2">
-            <a:extLst>
-              <a:ext uri="{FF2B5EF4-FFF2-40B4-BE49-F238E27FC236}">
-                <a16:creationId xmlns:a16="http://schemas.microsoft.com/office/drawing/2014/main" id="{A5CE8D89-C7A3-EB56-F061-6C561A1CE846}"/>
-              </a:ext>
-            </a:extLst>
-          </p:cNvPr>
+          <p:cNvPr id="3" name="Date Placeholder 2"/>
           <p:cNvSpPr>
             <a:spLocks noGrp="1"/>
           </p:cNvSpPr>
@@ -1973,7 +1726,6 @@
           <a:p>
             <a:fld id="{C5D0233E-43A8-4870-9DEC-1C669C6C5E88}" type="datetimeFigureOut">
               <a:rPr lang="en-US" smtClean="0"/>
-              <a:t>1/9/2026</a:t>
             </a:fld>
             <a:endParaRPr lang="en-US"/>
           </a:p>
@@ -1981,13 +1733,7 @@
       </p:sp>
       <p:sp>
         <p:nvSpPr>
-          <p:cNvPr id="4" name="Footer Placeholder 3">
-            <a:extLst>
-              <a:ext uri="{FF2B5EF4-FFF2-40B4-BE49-F238E27FC236}">
-                <a16:creationId xmlns:a16="http://schemas.microsoft.com/office/drawing/2014/main" id="{035C3701-A235-993C-AC11-ED6C078DE5FA}"/>
-              </a:ext>
-            </a:extLst>
-          </p:cNvPr>
+          <p:cNvPr id="4" name="Footer Placeholder 3"/>
           <p:cNvSpPr>
             <a:spLocks noGrp="1"/>
           </p:cNvSpPr>
@@ -2006,13 +1752,7 @@
       </p:sp>
       <p:sp>
         <p:nvSpPr>
-          <p:cNvPr id="5" name="Slide Number Placeholder 4">
-            <a:extLst>
-              <a:ext uri="{FF2B5EF4-FFF2-40B4-BE49-F238E27FC236}">
-                <a16:creationId xmlns:a16="http://schemas.microsoft.com/office/drawing/2014/main" id="{B2BEBFCA-D09C-1397-C5D9-BCC313F82985}"/>
-              </a:ext>
-            </a:extLst>
-          </p:cNvPr>
+          <p:cNvPr id="5" name="Slide Number Placeholder 4"/>
           <p:cNvSpPr>
             <a:spLocks noGrp="1"/>
           </p:cNvSpPr>
@@ -2027,18 +1767,12 @@
           <a:p>
             <a:fld id="{A4B1EAC5-66A7-4060-B82C-0A16C00808C0}" type="slidenum">
               <a:rPr lang="en-US" smtClean="0"/>
-              <a:t>‹#›</a:t>
             </a:fld>
             <a:endParaRPr lang="en-US"/>
           </a:p>
         </p:txBody>
       </p:sp>
     </p:spTree>
-    <p:extLst>
-      <p:ext uri="{BB962C8B-B14F-4D97-AF65-F5344CB8AC3E}">
-        <p14:creationId xmlns:p14="http://schemas.microsoft.com/office/powerpoint/2010/main" val="4121975447"/>
-      </p:ext>
-    </p:extLst>
   </p:cSld>
   <p:clrMapOvr>
     <a:masterClrMapping/>
@@ -2065,13 +1799,7 @@
       </p:grpSpPr>
       <p:sp>
         <p:nvSpPr>
-          <p:cNvPr id="2" name="Date Placeholder 1">
-            <a:extLst>
-              <a:ext uri="{FF2B5EF4-FFF2-40B4-BE49-F238E27FC236}">
-                <a16:creationId xmlns:a16="http://schemas.microsoft.com/office/drawing/2014/main" id="{98AC15EA-79C4-8857-477B-0B98EC27F904}"/>
-              </a:ext>
-            </a:extLst>
-          </p:cNvPr>
+          <p:cNvPr id="2" name="Date Placeholder 1"/>
           <p:cNvSpPr>
             <a:spLocks noGrp="1"/>
           </p:cNvSpPr>
@@ -2086,7 +1814,6 @@
           <a:p>
             <a:fld id="{C5D0233E-43A8-4870-9DEC-1C669C6C5E88}" type="datetimeFigureOut">
               <a:rPr lang="en-US" smtClean="0"/>
-              <a:t>1/9/2026</a:t>
             </a:fld>
             <a:endParaRPr lang="en-US"/>
           </a:p>
@@ -2094,13 +1821,7 @@
       </p:sp>
       <p:sp>
         <p:nvSpPr>
-          <p:cNvPr id="3" name="Footer Placeholder 2">
-            <a:extLst>
-              <a:ext uri="{FF2B5EF4-FFF2-40B4-BE49-F238E27FC236}">
-                <a16:creationId xmlns:a16="http://schemas.microsoft.com/office/drawing/2014/main" id="{F5F73CA3-5A1B-F7F4-FC29-E63163B69900}"/>
-              </a:ext>
-            </a:extLst>
-          </p:cNvPr>
+          <p:cNvPr id="3" name="Footer Placeholder 2"/>
           <p:cNvSpPr>
             <a:spLocks noGrp="1"/>
           </p:cNvSpPr>
@@ -2119,13 +1840,7 @@
       </p:sp>
       <p:sp>
         <p:nvSpPr>
-          <p:cNvPr id="4" name="Slide Number Placeholder 3">
-            <a:extLst>
-              <a:ext uri="{FF2B5EF4-FFF2-40B4-BE49-F238E27FC236}">
-                <a16:creationId xmlns:a16="http://schemas.microsoft.com/office/drawing/2014/main" id="{997491CC-312E-B465-89E6-05A1E48F1273}"/>
-              </a:ext>
-            </a:extLst>
-          </p:cNvPr>
+          <p:cNvPr id="4" name="Slide Number Placeholder 3"/>
           <p:cNvSpPr>
             <a:spLocks noGrp="1"/>
           </p:cNvSpPr>
@@ -2140,18 +1855,12 @@
           <a:p>
             <a:fld id="{A4B1EAC5-66A7-4060-B82C-0A16C00808C0}" type="slidenum">
               <a:rPr lang="en-US" smtClean="0"/>
-              <a:t>‹#›</a:t>
             </a:fld>
             <a:endParaRPr lang="en-US"/>
           </a:p>
         </p:txBody>
       </p:sp>
     </p:spTree>
-    <p:extLst>
-      <p:ext uri="{BB962C8B-B14F-4D97-AF65-F5344CB8AC3E}">
-        <p14:creationId xmlns:p14="http://schemas.microsoft.com/office/powerpoint/2010/main" val="1424596970"/>
-      </p:ext>
-    </p:extLst>
   </p:cSld>
   <p:clrMapOvr>
     <a:masterClrMapping/>
@@ -2178,13 +1887,7 @@
       </p:grpSpPr>
       <p:sp>
         <p:nvSpPr>
-          <p:cNvPr id="2" name="Title 1">
-            <a:extLst>
-              <a:ext uri="{FF2B5EF4-FFF2-40B4-BE49-F238E27FC236}">
-                <a16:creationId xmlns:a16="http://schemas.microsoft.com/office/drawing/2014/main" id="{D9EB4235-6A64-0D36-4F6C-3FC6F7D7178D}"/>
-              </a:ext>
-            </a:extLst>
-          </p:cNvPr>
+          <p:cNvPr id="2" name="Title 1"/>
           <p:cNvSpPr>
             <a:spLocks noGrp="1"/>
           </p:cNvSpPr>
@@ -2210,18 +1913,13 @@
               <a:rPr lang="en-US"/>
               <a:t>Click to edit Master title style</a:t>
             </a:r>
+            <a:endParaRPr lang="en-US"/>
           </a:p>
         </p:txBody>
       </p:sp>
       <p:sp>
         <p:nvSpPr>
-          <p:cNvPr id="3" name="Content Placeholder 2">
-            <a:extLst>
-              <a:ext uri="{FF2B5EF4-FFF2-40B4-BE49-F238E27FC236}">
-                <a16:creationId xmlns:a16="http://schemas.microsoft.com/office/drawing/2014/main" id="{9DB13D8A-FDB1-DCB6-7EBB-7C34AB3AD7BD}"/>
-              </a:ext>
-            </a:extLst>
-          </p:cNvPr>
+          <p:cNvPr id="3" name="Content Placeholder 2"/>
           <p:cNvSpPr>
             <a:spLocks noGrp="1"/>
           </p:cNvSpPr>
@@ -2272,6 +1970,7 @@
               <a:rPr lang="en-US"/>
               <a:t>Click to edit Master text styles</a:t>
             </a:r>
+            <a:endParaRPr lang="en-US"/>
           </a:p>
           <a:p>
             <a:pPr lvl="1"/>
@@ -2279,6 +1978,7 @@
               <a:rPr lang="en-US"/>
               <a:t>Second level</a:t>
             </a:r>
+            <a:endParaRPr lang="en-US"/>
           </a:p>
           <a:p>
             <a:pPr lvl="2"/>
@@ -2286,6 +1986,7 @@
               <a:rPr lang="en-US"/>
               <a:t>Third level</a:t>
             </a:r>
+            <a:endParaRPr lang="en-US"/>
           </a:p>
           <a:p>
             <a:pPr lvl="3"/>
@@ -2293,6 +1994,7 @@
               <a:rPr lang="en-US"/>
               <a:t>Fourth level</a:t>
             </a:r>
+            <a:endParaRPr lang="en-US"/>
           </a:p>
           <a:p>
             <a:pPr lvl="4"/>
@@ -2300,18 +2002,13 @@
               <a:rPr lang="en-US"/>
               <a:t>Fifth level</a:t>
             </a:r>
+            <a:endParaRPr lang="en-US"/>
           </a:p>
         </p:txBody>
       </p:sp>
       <p:sp>
         <p:nvSpPr>
-          <p:cNvPr id="4" name="Text Placeholder 3">
-            <a:extLst>
-              <a:ext uri="{FF2B5EF4-FFF2-40B4-BE49-F238E27FC236}">
-                <a16:creationId xmlns:a16="http://schemas.microsoft.com/office/drawing/2014/main" id="{0CAB03C6-5498-7504-5930-2BDCB9437E2D}"/>
-              </a:ext>
-            </a:extLst>
-          </p:cNvPr>
+          <p:cNvPr id="4" name="Text Placeholder 3"/>
           <p:cNvSpPr>
             <a:spLocks noGrp="1"/>
           </p:cNvSpPr>
@@ -2371,18 +2068,13 @@
               <a:rPr lang="en-US"/>
               <a:t>Click to edit Master text styles</a:t>
             </a:r>
+            <a:endParaRPr lang="en-US"/>
           </a:p>
         </p:txBody>
       </p:sp>
       <p:sp>
         <p:nvSpPr>
-          <p:cNvPr id="5" name="Date Placeholder 4">
-            <a:extLst>
-              <a:ext uri="{FF2B5EF4-FFF2-40B4-BE49-F238E27FC236}">
-                <a16:creationId xmlns:a16="http://schemas.microsoft.com/office/drawing/2014/main" id="{3E303C35-CC56-6F74-9DF1-D1164259400E}"/>
-              </a:ext>
-            </a:extLst>
-          </p:cNvPr>
+          <p:cNvPr id="5" name="Date Placeholder 4"/>
           <p:cNvSpPr>
             <a:spLocks noGrp="1"/>
           </p:cNvSpPr>
@@ -2397,7 +2089,6 @@
           <a:p>
             <a:fld id="{C5D0233E-43A8-4870-9DEC-1C669C6C5E88}" type="datetimeFigureOut">
               <a:rPr lang="en-US" smtClean="0"/>
-              <a:t>1/9/2026</a:t>
             </a:fld>
             <a:endParaRPr lang="en-US"/>
           </a:p>
@@ -2405,13 +2096,7 @@
       </p:sp>
       <p:sp>
         <p:nvSpPr>
-          <p:cNvPr id="6" name="Footer Placeholder 5">
-            <a:extLst>
-              <a:ext uri="{FF2B5EF4-FFF2-40B4-BE49-F238E27FC236}">
-                <a16:creationId xmlns:a16="http://schemas.microsoft.com/office/drawing/2014/main" id="{811997A1-066D-50EE-48CB-FD4543ACF789}"/>
-              </a:ext>
-            </a:extLst>
-          </p:cNvPr>
+          <p:cNvPr id="6" name="Footer Placeholder 5"/>
           <p:cNvSpPr>
             <a:spLocks noGrp="1"/>
           </p:cNvSpPr>
@@ -2430,13 +2115,7 @@
       </p:sp>
       <p:sp>
         <p:nvSpPr>
-          <p:cNvPr id="7" name="Slide Number Placeholder 6">
-            <a:extLst>
-              <a:ext uri="{FF2B5EF4-FFF2-40B4-BE49-F238E27FC236}">
-                <a16:creationId xmlns:a16="http://schemas.microsoft.com/office/drawing/2014/main" id="{D1602B57-B70D-6178-C591-0038038A4A3F}"/>
-              </a:ext>
-            </a:extLst>
-          </p:cNvPr>
+          <p:cNvPr id="7" name="Slide Number Placeholder 6"/>
           <p:cNvSpPr>
             <a:spLocks noGrp="1"/>
           </p:cNvSpPr>
@@ -2451,18 +2130,12 @@
           <a:p>
             <a:fld id="{A4B1EAC5-66A7-4060-B82C-0A16C00808C0}" type="slidenum">
               <a:rPr lang="en-US" smtClean="0"/>
-              <a:t>‹#›</a:t>
             </a:fld>
             <a:endParaRPr lang="en-US"/>
           </a:p>
         </p:txBody>
       </p:sp>
     </p:spTree>
-    <p:extLst>
-      <p:ext uri="{BB962C8B-B14F-4D97-AF65-F5344CB8AC3E}">
-        <p14:creationId xmlns:p14="http://schemas.microsoft.com/office/powerpoint/2010/main" val="3001308737"/>
-      </p:ext>
-    </p:extLst>
   </p:cSld>
   <p:clrMapOvr>
     <a:masterClrMapping/>
@@ -2489,13 +2162,7 @@
       </p:grpSpPr>
       <p:sp>
         <p:nvSpPr>
-          <p:cNvPr id="2" name="Title 1">
-            <a:extLst>
-              <a:ext uri="{FF2B5EF4-FFF2-40B4-BE49-F238E27FC236}">
-                <a16:creationId xmlns:a16="http://schemas.microsoft.com/office/drawing/2014/main" id="{C283B48D-F056-A8D2-787D-A2FFE0477C9E}"/>
-              </a:ext>
-            </a:extLst>
-          </p:cNvPr>
+          <p:cNvPr id="2" name="Title 1"/>
           <p:cNvSpPr>
             <a:spLocks noGrp="1"/>
           </p:cNvSpPr>
@@ -2521,18 +2188,13 @@
               <a:rPr lang="en-US"/>
               <a:t>Click to edit Master title style</a:t>
             </a:r>
+            <a:endParaRPr lang="en-US"/>
           </a:p>
         </p:txBody>
       </p:sp>
       <p:sp>
         <p:nvSpPr>
-          <p:cNvPr id="3" name="Picture Placeholder 2">
-            <a:extLst>
-              <a:ext uri="{FF2B5EF4-FFF2-40B4-BE49-F238E27FC236}">
-                <a16:creationId xmlns:a16="http://schemas.microsoft.com/office/drawing/2014/main" id="{4FF82015-ABBA-6A99-C569-E431D224E1C3}"/>
-              </a:ext>
-            </a:extLst>
-          </p:cNvPr>
+          <p:cNvPr id="3" name="Picture Placeholder 2"/>
           <p:cNvSpPr>
             <a:spLocks noGrp="1"/>
           </p:cNvSpPr>
@@ -2593,13 +2255,7 @@
       </p:sp>
       <p:sp>
         <p:nvSpPr>
-          <p:cNvPr id="4" name="Text Placeholder 3">
-            <a:extLst>
-              <a:ext uri="{FF2B5EF4-FFF2-40B4-BE49-F238E27FC236}">
-                <a16:creationId xmlns:a16="http://schemas.microsoft.com/office/drawing/2014/main" id="{56373556-6D34-F553-7B92-1B151D2C14B2}"/>
-              </a:ext>
-            </a:extLst>
-          </p:cNvPr>
+          <p:cNvPr id="4" name="Text Placeholder 3"/>
           <p:cNvSpPr>
             <a:spLocks noGrp="1"/>
           </p:cNvSpPr>
@@ -2659,18 +2315,13 @@
               <a:rPr lang="en-US"/>
               <a:t>Click to edit Master text styles</a:t>
             </a:r>
+            <a:endParaRPr lang="en-US"/>
           </a:p>
         </p:txBody>
       </p:sp>
       <p:sp>
         <p:nvSpPr>
-          <p:cNvPr id="5" name="Date Placeholder 4">
-            <a:extLst>
-              <a:ext uri="{FF2B5EF4-FFF2-40B4-BE49-F238E27FC236}">
-                <a16:creationId xmlns:a16="http://schemas.microsoft.com/office/drawing/2014/main" id="{F2E3C6DE-02C5-8FA7-903E-F346D23F0E02}"/>
-              </a:ext>
-            </a:extLst>
-          </p:cNvPr>
+          <p:cNvPr id="5" name="Date Placeholder 4"/>
           <p:cNvSpPr>
             <a:spLocks noGrp="1"/>
           </p:cNvSpPr>
@@ -2685,7 +2336,6 @@
           <a:p>
             <a:fld id="{C5D0233E-43A8-4870-9DEC-1C669C6C5E88}" type="datetimeFigureOut">
               <a:rPr lang="en-US" smtClean="0"/>
-              <a:t>1/9/2026</a:t>
             </a:fld>
             <a:endParaRPr lang="en-US"/>
           </a:p>
@@ -2693,13 +2343,7 @@
       </p:sp>
       <p:sp>
         <p:nvSpPr>
-          <p:cNvPr id="6" name="Footer Placeholder 5">
-            <a:extLst>
-              <a:ext uri="{FF2B5EF4-FFF2-40B4-BE49-F238E27FC236}">
-                <a16:creationId xmlns:a16="http://schemas.microsoft.com/office/drawing/2014/main" id="{A25B73DE-DA92-7E40-6C97-C236D68FB8B5}"/>
-              </a:ext>
-            </a:extLst>
-          </p:cNvPr>
+          <p:cNvPr id="6" name="Footer Placeholder 5"/>
           <p:cNvSpPr>
             <a:spLocks noGrp="1"/>
           </p:cNvSpPr>
@@ -2718,13 +2362,7 @@
       </p:sp>
       <p:sp>
         <p:nvSpPr>
-          <p:cNvPr id="7" name="Slide Number Placeholder 6">
-            <a:extLst>
-              <a:ext uri="{FF2B5EF4-FFF2-40B4-BE49-F238E27FC236}">
-                <a16:creationId xmlns:a16="http://schemas.microsoft.com/office/drawing/2014/main" id="{43220647-4AFC-AE1C-BD65-E4896D8C89E5}"/>
-              </a:ext>
-            </a:extLst>
-          </p:cNvPr>
+          <p:cNvPr id="7" name="Slide Number Placeholder 6"/>
           <p:cNvSpPr>
             <a:spLocks noGrp="1"/>
           </p:cNvSpPr>
@@ -2739,18 +2377,12 @@
           <a:p>
             <a:fld id="{A4B1EAC5-66A7-4060-B82C-0A16C00808C0}" type="slidenum">
               <a:rPr lang="en-US" smtClean="0"/>
-              <a:t>‹#›</a:t>
             </a:fld>
             <a:endParaRPr lang="en-US"/>
           </a:p>
         </p:txBody>
       </p:sp>
     </p:spTree>
-    <p:extLst>
-      <p:ext uri="{BB962C8B-B14F-4D97-AF65-F5344CB8AC3E}">
-        <p14:creationId xmlns:p14="http://schemas.microsoft.com/office/powerpoint/2010/main" val="1492041969"/>
-      </p:ext>
-    </p:extLst>
   </p:cSld>
   <p:clrMapOvr>
     <a:masterClrMapping/>
@@ -2782,13 +2414,7 @@
       </p:grpSpPr>
       <p:sp>
         <p:nvSpPr>
-          <p:cNvPr id="2" name="Title Placeholder 1">
-            <a:extLst>
-              <a:ext uri="{FF2B5EF4-FFF2-40B4-BE49-F238E27FC236}">
-                <a16:creationId xmlns:a16="http://schemas.microsoft.com/office/drawing/2014/main" id="{82B72D30-125B-8900-AA5E-8FE07E3CC559}"/>
-              </a:ext>
-            </a:extLst>
-          </p:cNvPr>
+          <p:cNvPr id="2" name="Title Placeholder 1"/>
           <p:cNvSpPr>
             <a:spLocks noGrp="1"/>
           </p:cNvSpPr>
@@ -2815,18 +2441,13 @@
               <a:rPr lang="en-US"/>
               <a:t>Click to edit Master title style</a:t>
             </a:r>
+            <a:endParaRPr lang="en-US"/>
           </a:p>
         </p:txBody>
       </p:sp>
       <p:sp>
         <p:nvSpPr>
-          <p:cNvPr id="3" name="Text Placeholder 2">
-            <a:extLst>
-              <a:ext uri="{FF2B5EF4-FFF2-40B4-BE49-F238E27FC236}">
-                <a16:creationId xmlns:a16="http://schemas.microsoft.com/office/drawing/2014/main" id="{9CDEAC7F-612C-0865-B22C-73E805EE3A28}"/>
-              </a:ext>
-            </a:extLst>
-          </p:cNvPr>
+          <p:cNvPr id="3" name="Text Placeholder 2"/>
           <p:cNvSpPr>
             <a:spLocks noGrp="1"/>
           </p:cNvSpPr>
@@ -2854,6 +2475,7 @@
               <a:rPr lang="en-US"/>
               <a:t>Click to edit Master text styles</a:t>
             </a:r>
+            <a:endParaRPr lang="en-US"/>
           </a:p>
           <a:p>
             <a:pPr lvl="1"/>
@@ -2861,6 +2483,7 @@
               <a:rPr lang="en-US"/>
               <a:t>Second level</a:t>
             </a:r>
+            <a:endParaRPr lang="en-US"/>
           </a:p>
           <a:p>
             <a:pPr lvl="2"/>
@@ -2868,6 +2491,7 @@
               <a:rPr lang="en-US"/>
               <a:t>Third level</a:t>
             </a:r>
+            <a:endParaRPr lang="en-US"/>
           </a:p>
           <a:p>
             <a:pPr lvl="3"/>
@@ -2875,6 +2499,7 @@
               <a:rPr lang="en-US"/>
               <a:t>Fourth level</a:t>
             </a:r>
+            <a:endParaRPr lang="en-US"/>
           </a:p>
           <a:p>
             <a:pPr lvl="4"/>
@@ -2882,18 +2507,13 @@
               <a:rPr lang="en-US"/>
               <a:t>Fifth level</a:t>
             </a:r>
+            <a:endParaRPr lang="en-US"/>
           </a:p>
         </p:txBody>
       </p:sp>
       <p:sp>
         <p:nvSpPr>
-          <p:cNvPr id="4" name="Date Placeholder 3">
-            <a:extLst>
-              <a:ext uri="{FF2B5EF4-FFF2-40B4-BE49-F238E27FC236}">
-                <a16:creationId xmlns:a16="http://schemas.microsoft.com/office/drawing/2014/main" id="{93D7A7BF-C74E-C80F-AA88-492ED54271BA}"/>
-              </a:ext>
-            </a:extLst>
-          </p:cNvPr>
+          <p:cNvPr id="4" name="Date Placeholder 3"/>
           <p:cNvSpPr>
             <a:spLocks noGrp="1"/>
           </p:cNvSpPr>
@@ -2926,7 +2546,6 @@
           <a:p>
             <a:fld id="{C5D0233E-43A8-4870-9DEC-1C669C6C5E88}" type="datetimeFigureOut">
               <a:rPr lang="en-US" smtClean="0"/>
-              <a:t>1/9/2026</a:t>
             </a:fld>
             <a:endParaRPr lang="en-US"/>
           </a:p>
@@ -2934,13 +2553,7 @@
       </p:sp>
       <p:sp>
         <p:nvSpPr>
-          <p:cNvPr id="5" name="Footer Placeholder 4">
-            <a:extLst>
-              <a:ext uri="{FF2B5EF4-FFF2-40B4-BE49-F238E27FC236}">
-                <a16:creationId xmlns:a16="http://schemas.microsoft.com/office/drawing/2014/main" id="{74B1242D-B978-C4BC-1E20-CC220CD5C366}"/>
-              </a:ext>
-            </a:extLst>
-          </p:cNvPr>
+          <p:cNvPr id="5" name="Footer Placeholder 4"/>
           <p:cNvSpPr>
             <a:spLocks noGrp="1"/>
           </p:cNvSpPr>
@@ -2977,13 +2590,7 @@
       </p:sp>
       <p:sp>
         <p:nvSpPr>
-          <p:cNvPr id="6" name="Slide Number Placeholder 5">
-            <a:extLst>
-              <a:ext uri="{FF2B5EF4-FFF2-40B4-BE49-F238E27FC236}">
-                <a16:creationId xmlns:a16="http://schemas.microsoft.com/office/drawing/2014/main" id="{950E7B06-588E-4D09-F0A7-D7CCAFC75AD4}"/>
-              </a:ext>
-            </a:extLst>
-          </p:cNvPr>
+          <p:cNvPr id="6" name="Slide Number Placeholder 5"/>
           <p:cNvSpPr>
             <a:spLocks noGrp="1"/>
           </p:cNvSpPr>
@@ -3016,18 +2623,12 @@
           <a:p>
             <a:fld id="{A4B1EAC5-66A7-4060-B82C-0A16C00808C0}" type="slidenum">
               <a:rPr lang="en-US" smtClean="0"/>
-              <a:t>‹#›</a:t>
             </a:fld>
             <a:endParaRPr lang="en-US"/>
           </a:p>
         </p:txBody>
       </p:sp>
     </p:spTree>
-    <p:extLst>
-      <p:ext uri="{BB962C8B-B14F-4D97-AF65-F5344CB8AC3E}">
-        <p14:creationId xmlns:p14="http://schemas.microsoft.com/office/powerpoint/2010/main" val="2514529163"/>
-      </p:ext>
-    </p:extLst>
   </p:cSld>
   <p:clrMap bg1="lt1" tx1="dk1" bg2="lt2" tx2="dk2" accent1="accent1" accent2="accent2" accent3="accent3" accent4="accent4" accent5="accent5" accent6="accent6" hlink="hlink" folHlink="folHlink"/>
   <p:sldLayoutIdLst>
@@ -3345,16 +2946,8 @@
       </p:grpSpPr>
       <p:sp>
         <p:nvSpPr>
-          <p:cNvPr id="4" name="Title 1">
-            <a:extLst>
-              <a:ext uri="{FF2B5EF4-FFF2-40B4-BE49-F238E27FC236}">
-                <a16:creationId xmlns:a16="http://schemas.microsoft.com/office/drawing/2014/main" id="{BC1E65A1-A518-BF35-2804-C00F881AB5A2}"/>
-              </a:ext>
-            </a:extLst>
-          </p:cNvPr>
-          <p:cNvSpPr txBox="1">
-            <a:spLocks/>
-          </p:cNvSpPr>
+          <p:cNvPr id="4" name="Title 1"/>
+          <p:cNvSpPr txBox="1"/>
           <p:nvPr/>
         </p:nvSpPr>
         <p:spPr>
@@ -3558,16 +3151,8 @@
       </p:sp>
       <p:sp>
         <p:nvSpPr>
-          <p:cNvPr id="5" name="Subtitle 2">
-            <a:extLst>
-              <a:ext uri="{FF2B5EF4-FFF2-40B4-BE49-F238E27FC236}">
-                <a16:creationId xmlns:a16="http://schemas.microsoft.com/office/drawing/2014/main" id="{0435AE13-626E-AD03-5E9C-2386B66B4610}"/>
-              </a:ext>
-            </a:extLst>
-          </p:cNvPr>
-          <p:cNvSpPr txBox="1">
-            <a:spLocks/>
-          </p:cNvSpPr>
+          <p:cNvPr id="5" name="Subtitle 2"/>
+          <p:cNvSpPr txBox="1"/>
           <p:nvPr/>
         </p:nvSpPr>
         <p:spPr>
@@ -3872,18 +3457,16 @@
               </a:rPr>
               <a:t>MSSV:110123074</a:t>
             </a:r>
+            <a:endParaRPr lang="en-US" sz="2000" dirty="0">
+              <a:latin typeface="Arial" panose="020B0604020202020204" pitchFamily="34" charset="0"/>
+              <a:cs typeface="Arial" panose="020B0604020202020204" pitchFamily="34" charset="0"/>
+            </a:endParaRPr>
           </a:p>
         </p:txBody>
       </p:sp>
       <p:sp>
         <p:nvSpPr>
-          <p:cNvPr id="8" name="TextBox 7">
-            <a:extLst>
-              <a:ext uri="{FF2B5EF4-FFF2-40B4-BE49-F238E27FC236}">
-                <a16:creationId xmlns:a16="http://schemas.microsoft.com/office/drawing/2014/main" id="{5FE48806-3392-B4CA-366D-422ECC5C5652}"/>
-              </a:ext>
-            </a:extLst>
-          </p:cNvPr>
+          <p:cNvPr id="8" name="TextBox 7"/>
           <p:cNvSpPr txBox="1"/>
           <p:nvPr/>
         </p:nvSpPr>
@@ -3911,25 +3494,23 @@
               </a:rPr>
               <a:t>ĐỒ ÁN CƠ SỞ NGÀNH</a:t>
             </a:r>
+            <a:endParaRPr lang="en-US" sz="4000" b="1" dirty="0">
+              <a:latin typeface="Arial" panose="020B0604020202020204" pitchFamily="34" charset="0"/>
+              <a:cs typeface="Arial" panose="020B0604020202020204" pitchFamily="34" charset="0"/>
+            </a:endParaRPr>
           </a:p>
         </p:txBody>
       </p:sp>
       <p:pic>
         <p:nvPicPr>
-          <p:cNvPr id="10" name="Picture 9">
-            <a:extLst>
-              <a:ext uri="{FF2B5EF4-FFF2-40B4-BE49-F238E27FC236}">
-                <a16:creationId xmlns:a16="http://schemas.microsoft.com/office/drawing/2014/main" id="{4E011671-9098-3DC3-51D4-0A27923BB2F7}"/>
-              </a:ext>
-            </a:extLst>
-          </p:cNvPr>
+          <p:cNvPr id="10" name="Picture 9"/>
           <p:cNvPicPr>
             <a:picLocks noChangeAspect="1"/>
           </p:cNvPicPr>
           <p:nvPr/>
         </p:nvPicPr>
         <p:blipFill>
-          <a:blip r:embed="rId2">
+          <a:blip r:embed="rId1">
             <a:extLst>
               <a:ext uri="{28A0092B-C50C-407E-A947-70E740481C1C}">
                 <a14:useLocalDpi xmlns:a14="http://schemas.microsoft.com/office/drawing/2010/main" val="0"/>
@@ -3951,11 +3532,6 @@
         </p:spPr>
       </p:pic>
     </p:spTree>
-    <p:extLst>
-      <p:ext uri="{BB962C8B-B14F-4D97-AF65-F5344CB8AC3E}">
-        <p14:creationId xmlns:p14="http://schemas.microsoft.com/office/powerpoint/2010/main" val="3186993240"/>
-      </p:ext>
-    </p:extLst>
   </p:cSld>
   <p:clrMapOvr>
     <a:masterClrMapping/>
@@ -3982,13 +3558,7 @@
       </p:grpSpPr>
       <p:sp>
         <p:nvSpPr>
-          <p:cNvPr id="2" name="Title 1">
-            <a:extLst>
-              <a:ext uri="{FF2B5EF4-FFF2-40B4-BE49-F238E27FC236}">
-                <a16:creationId xmlns:a16="http://schemas.microsoft.com/office/drawing/2014/main" id="{BA9D9696-C156-1FE2-129C-116FAA12E55D}"/>
-              </a:ext>
-            </a:extLst>
-          </p:cNvPr>
+          <p:cNvPr id="2" name="Title 1"/>
           <p:cNvSpPr>
             <a:spLocks noGrp="1"/>
           </p:cNvSpPr>
@@ -4016,13 +3586,7 @@
       </p:sp>
       <p:sp>
         <p:nvSpPr>
-          <p:cNvPr id="3" name="Content Placeholder 2">
-            <a:extLst>
-              <a:ext uri="{FF2B5EF4-FFF2-40B4-BE49-F238E27FC236}">
-                <a16:creationId xmlns:a16="http://schemas.microsoft.com/office/drawing/2014/main" id="{D008F00B-0AAE-AC6A-B8AD-E20049A62975}"/>
-              </a:ext>
-            </a:extLst>
-          </p:cNvPr>
+          <p:cNvPr id="3" name="Content Placeholder 2"/>
           <p:cNvSpPr>
             <a:spLocks noGrp="1"/>
           </p:cNvSpPr>
@@ -4276,6 +3840,10 @@
               </a:rPr>
               <a:t>:</a:t>
             </a:r>
+            <a:endParaRPr lang="en-US" sz="2000" dirty="0">
+              <a:latin typeface="Arial" panose="020B0604020202020204" pitchFamily="34" charset="0"/>
+              <a:cs typeface="Arial" panose="020B0604020202020204" pitchFamily="34" charset="0"/>
+            </a:endParaRPr>
           </a:p>
           <a:p>
             <a:pPr marL="0" indent="0">
@@ -4563,20 +4131,14 @@
       </p:sp>
       <p:pic>
         <p:nvPicPr>
-          <p:cNvPr id="7" name="Picture 6">
-            <a:extLst>
-              <a:ext uri="{FF2B5EF4-FFF2-40B4-BE49-F238E27FC236}">
-                <a16:creationId xmlns:a16="http://schemas.microsoft.com/office/drawing/2014/main" id="{4759BFF7-1383-6653-77C6-6B0F348F782F}"/>
-              </a:ext>
-            </a:extLst>
-          </p:cNvPr>
+          <p:cNvPr id="7" name="Picture 6"/>
           <p:cNvPicPr>
             <a:picLocks noChangeAspect="1"/>
           </p:cNvPicPr>
           <p:nvPr/>
         </p:nvPicPr>
         <p:blipFill>
-          <a:blip r:embed="rId2">
+          <a:blip r:embed="rId1">
             <a:extLst>
               <a:ext uri="{28A0092B-C50C-407E-A947-70E740481C1C}">
                 <a14:useLocalDpi xmlns:a14="http://schemas.microsoft.com/office/drawing/2010/main" val="0"/>
@@ -4598,11 +4160,6 @@
         </p:spPr>
       </p:pic>
     </p:spTree>
-    <p:extLst>
-      <p:ext uri="{BB962C8B-B14F-4D97-AF65-F5344CB8AC3E}">
-        <p14:creationId xmlns:p14="http://schemas.microsoft.com/office/powerpoint/2010/main" val="343679537"/>
-      </p:ext>
-    </p:extLst>
   </p:cSld>
   <p:clrMapOvr>
     <a:masterClrMapping/>
@@ -4629,13 +4186,7 @@
       </p:grpSpPr>
       <p:sp>
         <p:nvSpPr>
-          <p:cNvPr id="2" name="Title 1">
-            <a:extLst>
-              <a:ext uri="{FF2B5EF4-FFF2-40B4-BE49-F238E27FC236}">
-                <a16:creationId xmlns:a16="http://schemas.microsoft.com/office/drawing/2014/main" id="{8674D895-DDF1-A45B-3306-D0DCCBF9CB06}"/>
-              </a:ext>
-            </a:extLst>
-          </p:cNvPr>
+          <p:cNvPr id="2" name="Title 1"/>
           <p:cNvSpPr>
             <a:spLocks noGrp="1"/>
           </p:cNvSpPr>
@@ -4664,18 +4215,16 @@
               </a:rPr>
               <a:t>	</a:t>
             </a:r>
+            <a:endParaRPr lang="en-US" sz="4000" dirty="0">
+              <a:latin typeface="Arial" panose="020B0604020202020204" pitchFamily="34" charset="0"/>
+              <a:cs typeface="Arial" panose="020B0604020202020204" pitchFamily="34" charset="0"/>
+            </a:endParaRPr>
           </a:p>
         </p:txBody>
       </p:sp>
       <p:sp>
         <p:nvSpPr>
-          <p:cNvPr id="4" name="Rectangle 1">
-            <a:extLst>
-              <a:ext uri="{FF2B5EF4-FFF2-40B4-BE49-F238E27FC236}">
-                <a16:creationId xmlns:a16="http://schemas.microsoft.com/office/drawing/2014/main" id="{B82206E1-C9F7-60B3-F3E8-0559F83F5585}"/>
-              </a:ext>
-            </a:extLst>
-          </p:cNvPr>
+          <p:cNvPr id="4" name="Rectangle 1"/>
           <p:cNvSpPr>
             <a:spLocks noGrp="1" noChangeArrowheads="1"/>
           </p:cNvSpPr>
@@ -4685,7 +4234,7 @@
         </p:nvSpPr>
         <p:spPr bwMode="auto">
           <a:xfrm>
-            <a:off x="956187" y="1690688"/>
+            <a:off x="955552" y="1954213"/>
             <a:ext cx="4044697" cy="1015663"/>
           </a:xfrm>
           <a:prstGeom prst="rect">
@@ -4727,9 +4276,6 @@
         </p:spPr>
         <p:txBody>
           <a:bodyPr vert="horz" wrap="none" lIns="91440" tIns="45720" rIns="91440" bIns="45720" numCol="1" anchor="ctr" anchorCtr="0" compatLnSpc="1">
-            <a:prstTxWarp prst="textNoShape">
-              <a:avLst/>
-            </a:prstTxWarp>
             <a:spAutoFit/>
           </a:bodyPr>
           <a:lstStyle/>
@@ -4747,7 +4293,6 @@
               <a:buClrTx/>
               <a:buSzTx/>
               <a:buNone/>
-              <a:tabLst/>
             </a:pPr>
             <a:r>
               <a:rPr kumimoji="0" lang="en-US" altLang="en-US" sz="2000" b="0" i="0" u="none" strike="noStrike" cap="none" normalizeH="0" baseline="0" dirty="0">
@@ -4878,7 +4423,6 @@
               <a:buClrTx/>
               <a:buSzTx/>
               <a:buNone/>
-              <a:tabLst/>
             </a:pPr>
             <a:r>
               <a:rPr kumimoji="0" lang="en-US" altLang="en-US" sz="2000" b="0" i="0" u="none" strike="noStrike" cap="none" normalizeH="0" baseline="0" dirty="0">
@@ -5009,7 +4553,6 @@
               <a:buClrTx/>
               <a:buSzTx/>
               <a:buNone/>
-              <a:tabLst/>
             </a:pPr>
             <a:r>
               <a:rPr kumimoji="0" lang="en-US" altLang="en-US" sz="2000" b="0" i="0" u="none" strike="noStrike" cap="none" normalizeH="0" baseline="0" dirty="0">
@@ -5154,25 +4697,29 @@
               </a:rPr>
               <a:t> webcam</a:t>
             </a:r>
+            <a:endParaRPr kumimoji="0" lang="en-US" altLang="en-US" sz="2000" b="0" i="0" u="none" strike="noStrike" cap="none" normalizeH="0" baseline="0" dirty="0">
+              <a:ln>
+                <a:noFill/>
+              </a:ln>
+              <a:solidFill>
+                <a:schemeClr val="tx1"/>
+              </a:solidFill>
+              <a:effectLst/>
+              <a:latin typeface="Arial" panose="020B0604020202020204" pitchFamily="34" charset="0"/>
+            </a:endParaRPr>
           </a:p>
         </p:txBody>
       </p:sp>
       <p:pic>
         <p:nvPicPr>
-          <p:cNvPr id="7" name="Picture 6">
-            <a:extLst>
-              <a:ext uri="{FF2B5EF4-FFF2-40B4-BE49-F238E27FC236}">
-                <a16:creationId xmlns:a16="http://schemas.microsoft.com/office/drawing/2014/main" id="{772C3A53-C5CB-8CAC-F965-01BE52450666}"/>
-              </a:ext>
-            </a:extLst>
-          </p:cNvPr>
+          <p:cNvPr id="7" name="Picture 6"/>
           <p:cNvPicPr>
             <a:picLocks noChangeAspect="1"/>
           </p:cNvPicPr>
           <p:nvPr/>
         </p:nvPicPr>
         <p:blipFill>
-          <a:blip r:embed="rId2">
+          <a:blip r:embed="rId1">
             <a:extLst>
               <a:ext uri="{28A0092B-C50C-407E-A947-70E740481C1C}">
                 <a14:useLocalDpi xmlns:a14="http://schemas.microsoft.com/office/drawing/2010/main" val="0"/>
@@ -5185,7 +4732,7 @@
         </p:blipFill>
         <p:spPr>
           <a:xfrm>
-            <a:off x="1054300" y="3266906"/>
+            <a:off x="5763460" y="1448266"/>
             <a:ext cx="3848469" cy="2560981"/>
           </a:xfrm>
           <a:prstGeom prst="rect">
@@ -5194,11 +4741,6 @@
         </p:spPr>
       </p:pic>
     </p:spTree>
-    <p:extLst>
-      <p:ext uri="{BB962C8B-B14F-4D97-AF65-F5344CB8AC3E}">
-        <p14:creationId xmlns:p14="http://schemas.microsoft.com/office/powerpoint/2010/main" val="1713785726"/>
-      </p:ext>
-    </p:extLst>
   </p:cSld>
   <p:clrMapOvr>
     <a:masterClrMapping/>
@@ -5225,13 +4767,7 @@
       </p:grpSpPr>
       <p:sp>
         <p:nvSpPr>
-          <p:cNvPr id="2" name="Title 1">
-            <a:extLst>
-              <a:ext uri="{FF2B5EF4-FFF2-40B4-BE49-F238E27FC236}">
-                <a16:creationId xmlns:a16="http://schemas.microsoft.com/office/drawing/2014/main" id="{6EB10DDC-9EE4-D876-F4B6-D99819AE3F8E}"/>
-              </a:ext>
-            </a:extLst>
-          </p:cNvPr>
+          <p:cNvPr id="2" name="Title 1"/>
           <p:cNvSpPr>
             <a:spLocks noGrp="1"/>
           </p:cNvSpPr>
@@ -5253,18 +4789,16 @@
               </a:rPr>
               <a:t>THU THẬP DỮ LIỆU</a:t>
             </a:r>
+            <a:endParaRPr lang="en-US" sz="3200" b="1" dirty="0">
+              <a:latin typeface="Arial" panose="020B0604020202020204" pitchFamily="34" charset="0"/>
+              <a:cs typeface="Arial" panose="020B0604020202020204" pitchFamily="34" charset="0"/>
+            </a:endParaRPr>
           </a:p>
         </p:txBody>
       </p:sp>
       <p:sp>
         <p:nvSpPr>
-          <p:cNvPr id="4" name="Rectangle 1">
-            <a:extLst>
-              <a:ext uri="{FF2B5EF4-FFF2-40B4-BE49-F238E27FC236}">
-                <a16:creationId xmlns:a16="http://schemas.microsoft.com/office/drawing/2014/main" id="{8C3B04DD-6B52-13AB-0F2E-DC6D6598EEA7}"/>
-              </a:ext>
-            </a:extLst>
-          </p:cNvPr>
+          <p:cNvPr id="4" name="Rectangle 1"/>
           <p:cNvSpPr>
             <a:spLocks noGrp="1" noChangeArrowheads="1"/>
           </p:cNvSpPr>
@@ -5316,9 +4850,6 @@
         </p:spPr>
         <p:txBody>
           <a:bodyPr vert="horz" wrap="square" lIns="91440" tIns="45720" rIns="91440" bIns="45720" numCol="1" anchor="ctr" anchorCtr="0" compatLnSpc="1">
-            <a:prstTxWarp prst="textNoShape">
-              <a:avLst/>
-            </a:prstTxWarp>
             <a:spAutoFit/>
           </a:bodyPr>
           <a:lstStyle/>
@@ -5461,6 +4992,10 @@
               </a:rPr>
               <a:t>:</a:t>
             </a:r>
+            <a:endParaRPr lang="en-US" sz="2000" dirty="0">
+              <a:latin typeface="Arial" panose="020B0604020202020204" pitchFamily="34" charset="0"/>
+              <a:cs typeface="Arial" panose="020B0604020202020204" pitchFamily="34" charset="0"/>
+            </a:endParaRPr>
           </a:p>
           <a:p>
             <a:pPr marL="0" indent="0">
@@ -5641,6 +5176,10 @@
               </a:rPr>
               <a:t>.</a:t>
             </a:r>
+            <a:endParaRPr lang="en-US" sz="2000" dirty="0">
+              <a:latin typeface="Arial" panose="020B0604020202020204" pitchFamily="34" charset="0"/>
+              <a:cs typeface="Arial" panose="020B0604020202020204" pitchFamily="34" charset="0"/>
+            </a:endParaRPr>
           </a:p>
           <a:p>
             <a:pPr marL="0" indent="0">
@@ -5765,6 +5304,10 @@
               </a:rPr>
               <a:t>.</a:t>
             </a:r>
+            <a:endParaRPr lang="en-US" sz="2000" dirty="0">
+              <a:latin typeface="Arial" panose="020B0604020202020204" pitchFamily="34" charset="0"/>
+              <a:cs typeface="Arial" panose="020B0604020202020204" pitchFamily="34" charset="0"/>
+            </a:endParaRPr>
           </a:p>
           <a:p>
             <a:pPr marL="0" indent="0">
@@ -5847,6 +5390,10 @@
               </a:rPr>
               <a:t> Haar Cascade.</a:t>
             </a:r>
+            <a:endParaRPr lang="en-US" sz="2000" dirty="0">
+              <a:latin typeface="Arial" panose="020B0604020202020204" pitchFamily="34" charset="0"/>
+              <a:cs typeface="Arial" panose="020B0604020202020204" pitchFamily="34" charset="0"/>
+            </a:endParaRPr>
           </a:p>
           <a:p>
             <a:pPr marL="0" indent="0">
@@ -5971,6 +5518,10 @@
               </a:rPr>
               <a:t> (200×200 pixel).</a:t>
             </a:r>
+            <a:endParaRPr lang="en-US" sz="2000" dirty="0">
+              <a:latin typeface="Arial" panose="020B0604020202020204" pitchFamily="34" charset="0"/>
+              <a:cs typeface="Arial" panose="020B0604020202020204" pitchFamily="34" charset="0"/>
+            </a:endParaRPr>
           </a:p>
           <a:p>
             <a:pPr marL="0" indent="0">
@@ -6081,6 +5632,10 @@
               </a:rPr>
               <a:t> User.&lt;ID&gt;.&lt;STT&gt;.jpg.</a:t>
             </a:r>
+            <a:endParaRPr lang="en-US" sz="2000" dirty="0">
+              <a:latin typeface="Arial" panose="020B0604020202020204" pitchFamily="34" charset="0"/>
+              <a:cs typeface="Arial" panose="020B0604020202020204" pitchFamily="34" charset="0"/>
+            </a:endParaRPr>
           </a:p>
           <a:p>
             <a:pPr marL="0" indent="0">
@@ -6394,25 +5949,23 @@
               </a:rPr>
               <a:t>.</a:t>
             </a:r>
+            <a:endParaRPr lang="en-US" sz="2000" dirty="0">
+              <a:latin typeface="Arial" panose="020B0604020202020204" pitchFamily="34" charset="0"/>
+              <a:cs typeface="Arial" panose="020B0604020202020204" pitchFamily="34" charset="0"/>
+            </a:endParaRPr>
           </a:p>
         </p:txBody>
       </p:sp>
       <p:pic>
         <p:nvPicPr>
-          <p:cNvPr id="5" name="Picture 4">
-            <a:extLst>
-              <a:ext uri="{FF2B5EF4-FFF2-40B4-BE49-F238E27FC236}">
-                <a16:creationId xmlns:a16="http://schemas.microsoft.com/office/drawing/2014/main" id="{C86BEACD-7860-850F-F1B0-22F6709956B8}"/>
-              </a:ext>
-            </a:extLst>
-          </p:cNvPr>
+          <p:cNvPr id="5" name="Picture 4"/>
           <p:cNvPicPr>
             <a:picLocks noChangeAspect="1"/>
           </p:cNvPicPr>
           <p:nvPr/>
         </p:nvPicPr>
         <p:blipFill>
-          <a:blip r:embed="rId2">
+          <a:blip r:embed="rId1">
             <a:extLst>
               <a:ext uri="{28A0092B-C50C-407E-A947-70E740481C1C}">
                 <a14:useLocalDpi xmlns:a14="http://schemas.microsoft.com/office/drawing/2010/main" val="0"/>
@@ -6435,11 +5988,6 @@
         </p:spPr>
       </p:pic>
     </p:spTree>
-    <p:extLst>
-      <p:ext uri="{BB962C8B-B14F-4D97-AF65-F5344CB8AC3E}">
-        <p14:creationId xmlns:p14="http://schemas.microsoft.com/office/powerpoint/2010/main" val="824727176"/>
-      </p:ext>
-    </p:extLst>
   </p:cSld>
   <p:clrMapOvr>
     <a:masterClrMapping/>
@@ -6466,13 +6014,7 @@
       </p:grpSpPr>
       <p:sp>
         <p:nvSpPr>
-          <p:cNvPr id="2" name="Title 1">
-            <a:extLst>
-              <a:ext uri="{FF2B5EF4-FFF2-40B4-BE49-F238E27FC236}">
-                <a16:creationId xmlns:a16="http://schemas.microsoft.com/office/drawing/2014/main" id="{F61D987E-7AD9-7BC5-72A7-1BAECC13A036}"/>
-              </a:ext>
-            </a:extLst>
-          </p:cNvPr>
+          <p:cNvPr id="2" name="Title 1"/>
           <p:cNvSpPr>
             <a:spLocks noGrp="1"/>
           </p:cNvSpPr>
@@ -6494,18 +6036,16 @@
               </a:rPr>
               <a:t>HUẤN LUYỆN MÔ HÌNH</a:t>
             </a:r>
+            <a:endParaRPr lang="en-US" sz="4000" b="1" dirty="0">
+              <a:latin typeface="Arial" panose="020B0604020202020204" pitchFamily="34" charset="0"/>
+              <a:cs typeface="Arial" panose="020B0604020202020204" pitchFamily="34" charset="0"/>
+            </a:endParaRPr>
           </a:p>
         </p:txBody>
       </p:sp>
       <p:sp>
         <p:nvSpPr>
-          <p:cNvPr id="4" name="Rectangle 1">
-            <a:extLst>
-              <a:ext uri="{FF2B5EF4-FFF2-40B4-BE49-F238E27FC236}">
-                <a16:creationId xmlns:a16="http://schemas.microsoft.com/office/drawing/2014/main" id="{40E5AD2B-1BEC-D147-6105-0A8E9B3CA8D4}"/>
-              </a:ext>
-            </a:extLst>
-          </p:cNvPr>
+          <p:cNvPr id="4" name="Rectangle 1"/>
           <p:cNvSpPr>
             <a:spLocks noGrp="1" noChangeArrowheads="1"/>
           </p:cNvSpPr>
@@ -6557,9 +6097,6 @@
         </p:spPr>
         <p:txBody>
           <a:bodyPr vert="horz" wrap="none" lIns="91440" tIns="45720" rIns="91440" bIns="45720" numCol="1" anchor="ctr" anchorCtr="0" compatLnSpc="1">
-            <a:prstTxWarp prst="textNoShape">
-              <a:avLst/>
-            </a:prstTxWarp>
             <a:spAutoFit/>
           </a:bodyPr>
           <a:lstStyle/>
@@ -6615,6 +6152,7 @@
               <a:rPr lang="en-US" sz="2000" dirty="0"/>
               <a:t>:</a:t>
             </a:r>
+            <a:endParaRPr lang="en-US" sz="2000" dirty="0"/>
           </a:p>
           <a:p>
             <a:pPr marL="0" indent="0">
@@ -6680,6 +6218,7 @@
               <a:rPr lang="en-US" sz="2000" dirty="0"/>
               <a:t> dataset.</a:t>
             </a:r>
+            <a:endParaRPr lang="en-US" sz="2000" dirty="0"/>
           </a:p>
           <a:p>
             <a:pPr marL="0" indent="0">
@@ -6745,6 +6284,7 @@
               <a:rPr lang="en-US" sz="2000" dirty="0"/>
               <a:t>.</a:t>
             </a:r>
+            <a:endParaRPr lang="en-US" sz="2000" dirty="0"/>
           </a:p>
           <a:p>
             <a:pPr marL="0" indent="0">
@@ -6826,6 +6366,7 @@
               <a:rPr lang="en-US" sz="2000" dirty="0"/>
               <a:t> LBPH.</a:t>
             </a:r>
+            <a:endParaRPr lang="en-US" sz="2000" dirty="0"/>
           </a:p>
           <a:p>
             <a:pPr marL="0" indent="0">
@@ -6915,6 +6456,7 @@
               <a:rPr lang="en-US" sz="2000" dirty="0"/>
               <a:t>.</a:t>
             </a:r>
+            <a:endParaRPr lang="en-US" sz="2000" dirty="0"/>
           </a:p>
           <a:p>
             <a:pPr marL="0" indent="0">
@@ -7044,6 +6586,7 @@
               <a:rPr lang="en-US" sz="2000" dirty="0"/>
               <a:t>.</a:t>
             </a:r>
+            <a:endParaRPr lang="en-US" sz="2000" dirty="0"/>
           </a:p>
           <a:p>
             <a:pPr marL="0" indent="0">
@@ -7055,20 +6598,14 @@
       </p:sp>
       <p:pic>
         <p:nvPicPr>
-          <p:cNvPr id="5" name="Picture 4">
-            <a:extLst>
-              <a:ext uri="{FF2B5EF4-FFF2-40B4-BE49-F238E27FC236}">
-                <a16:creationId xmlns:a16="http://schemas.microsoft.com/office/drawing/2014/main" id="{4B361F88-2FCB-D6B4-45D1-34C458E0D708}"/>
-              </a:ext>
-            </a:extLst>
-          </p:cNvPr>
+          <p:cNvPr id="5" name="Picture 4"/>
           <p:cNvPicPr>
             <a:picLocks noChangeAspect="1"/>
           </p:cNvPicPr>
           <p:nvPr/>
         </p:nvPicPr>
         <p:blipFill>
-          <a:blip r:embed="rId2">
+          <a:blip r:embed="rId1">
             <a:extLst>
               <a:ext uri="{28A0092B-C50C-407E-A947-70E740481C1C}">
                 <a14:useLocalDpi xmlns:a14="http://schemas.microsoft.com/office/drawing/2010/main" val="0"/>
@@ -7090,11 +6627,6 @@
         </p:spPr>
       </p:pic>
     </p:spTree>
-    <p:extLst>
-      <p:ext uri="{BB962C8B-B14F-4D97-AF65-F5344CB8AC3E}">
-        <p14:creationId xmlns:p14="http://schemas.microsoft.com/office/powerpoint/2010/main" val="2486248273"/>
-      </p:ext>
-    </p:extLst>
   </p:cSld>
   <p:clrMapOvr>
     <a:masterClrMapping/>
@@ -7121,13 +6653,7 @@
       </p:grpSpPr>
       <p:sp>
         <p:nvSpPr>
-          <p:cNvPr id="2" name="Title 1">
-            <a:extLst>
-              <a:ext uri="{FF2B5EF4-FFF2-40B4-BE49-F238E27FC236}">
-                <a16:creationId xmlns:a16="http://schemas.microsoft.com/office/drawing/2014/main" id="{3A6ADFCB-1C0F-65DF-037C-78D16369D2BA}"/>
-              </a:ext>
-            </a:extLst>
-          </p:cNvPr>
+          <p:cNvPr id="2" name="Title 1"/>
           <p:cNvSpPr>
             <a:spLocks noGrp="1"/>
           </p:cNvSpPr>
@@ -7158,13 +6684,7 @@
       </p:sp>
       <p:sp>
         <p:nvSpPr>
-          <p:cNvPr id="4" name="Rectangle 1">
-            <a:extLst>
-              <a:ext uri="{FF2B5EF4-FFF2-40B4-BE49-F238E27FC236}">
-                <a16:creationId xmlns:a16="http://schemas.microsoft.com/office/drawing/2014/main" id="{2B3DFD62-99AC-C741-8BA1-B08244D6E63F}"/>
-              </a:ext>
-            </a:extLst>
-          </p:cNvPr>
+          <p:cNvPr id="4" name="Rectangle 1"/>
           <p:cNvSpPr>
             <a:spLocks noGrp="1" noChangeArrowheads="1"/>
           </p:cNvSpPr>
@@ -7216,9 +6736,6 @@
         </p:spPr>
         <p:txBody>
           <a:bodyPr vert="horz" wrap="square" lIns="91440" tIns="45720" rIns="91440" bIns="45720" numCol="1" anchor="ctr" anchorCtr="0" compatLnSpc="1">
-            <a:prstTxWarp prst="textNoShape">
-              <a:avLst/>
-            </a:prstTxWarp>
             <a:spAutoFit/>
           </a:bodyPr>
           <a:lstStyle/>
@@ -7319,6 +6836,10 @@
               </a:rPr>
               <a:t>:</a:t>
             </a:r>
+            <a:endParaRPr lang="en-US" sz="2000" dirty="0">
+              <a:latin typeface="Arial" panose="020B0604020202020204" pitchFamily="34" charset="0"/>
+              <a:cs typeface="Arial" panose="020B0604020202020204" pitchFamily="34" charset="0"/>
+            </a:endParaRPr>
           </a:p>
           <a:p>
             <a:pPr marL="0" indent="0">
@@ -7457,6 +6978,10 @@
               </a:rPr>
               <a:t> 200×200.</a:t>
             </a:r>
+            <a:endParaRPr lang="en-US" sz="2000" dirty="0">
+              <a:latin typeface="Arial" panose="020B0604020202020204" pitchFamily="34" charset="0"/>
+              <a:cs typeface="Arial" panose="020B0604020202020204" pitchFamily="34" charset="0"/>
+            </a:endParaRPr>
           </a:p>
           <a:p>
             <a:pPr marL="0" indent="0">
@@ -7623,6 +7148,10 @@
               </a:rPr>
               <a:t> (confidence).</a:t>
             </a:r>
+            <a:endParaRPr lang="en-US" sz="2000" dirty="0">
+              <a:latin typeface="Arial" panose="020B0604020202020204" pitchFamily="34" charset="0"/>
+              <a:cs typeface="Arial" panose="020B0604020202020204" pitchFamily="34" charset="0"/>
+            </a:endParaRPr>
           </a:p>
           <a:p>
             <a:pPr marL="0" indent="0">
@@ -7817,6 +7346,10 @@
               </a:rPr>
               <a:t>.</a:t>
             </a:r>
+            <a:endParaRPr lang="en-US" sz="2000" dirty="0">
+              <a:latin typeface="Arial" panose="020B0604020202020204" pitchFamily="34" charset="0"/>
+              <a:cs typeface="Arial" panose="020B0604020202020204" pitchFamily="34" charset="0"/>
+            </a:endParaRPr>
           </a:p>
           <a:p>
             <a:pPr marL="0" indent="0">
@@ -8067,6 +7600,10 @@
               </a:rPr>
               <a:t>.</a:t>
             </a:r>
+            <a:endParaRPr lang="en-US" sz="2000" dirty="0">
+              <a:latin typeface="Arial" panose="020B0604020202020204" pitchFamily="34" charset="0"/>
+              <a:cs typeface="Arial" panose="020B0604020202020204" pitchFamily="34" charset="0"/>
+            </a:endParaRPr>
           </a:p>
           <a:p>
             <a:pPr marL="0" indent="0">
@@ -8303,25 +7840,23 @@
               </a:rPr>
               <a:t>.</a:t>
             </a:r>
+            <a:endParaRPr lang="en-US" sz="2000" dirty="0">
+              <a:latin typeface="Arial" panose="020B0604020202020204" pitchFamily="34" charset="0"/>
+              <a:cs typeface="Arial" panose="020B0604020202020204" pitchFamily="34" charset="0"/>
+            </a:endParaRPr>
           </a:p>
         </p:txBody>
       </p:sp>
       <p:pic>
         <p:nvPicPr>
-          <p:cNvPr id="5" name="Picture 4">
-            <a:extLst>
-              <a:ext uri="{FF2B5EF4-FFF2-40B4-BE49-F238E27FC236}">
-                <a16:creationId xmlns:a16="http://schemas.microsoft.com/office/drawing/2014/main" id="{E895A6F3-04D0-2657-2FEC-5A7941EC86C5}"/>
-              </a:ext>
-            </a:extLst>
-          </p:cNvPr>
+          <p:cNvPr id="5" name="Picture 4"/>
           <p:cNvPicPr>
             <a:picLocks noChangeAspect="1"/>
           </p:cNvPicPr>
           <p:nvPr/>
         </p:nvPicPr>
         <p:blipFill>
-          <a:blip r:embed="rId2">
+          <a:blip r:embed="rId1">
             <a:extLst>
               <a:ext uri="{28A0092B-C50C-407E-A947-70E740481C1C}">
                 <a14:useLocalDpi xmlns:a14="http://schemas.microsoft.com/office/drawing/2010/main" val="0"/>
@@ -8343,11 +7878,6 @@
         </p:spPr>
       </p:pic>
     </p:spTree>
-    <p:extLst>
-      <p:ext uri="{BB962C8B-B14F-4D97-AF65-F5344CB8AC3E}">
-        <p14:creationId xmlns:p14="http://schemas.microsoft.com/office/powerpoint/2010/main" val="1293072382"/>
-      </p:ext>
-    </p:extLst>
   </p:cSld>
   <p:clrMapOvr>
     <a:masterClrMapping/>
@@ -8374,13 +7904,7 @@
       </p:grpSpPr>
       <p:sp>
         <p:nvSpPr>
-          <p:cNvPr id="2" name="Title 1">
-            <a:extLst>
-              <a:ext uri="{FF2B5EF4-FFF2-40B4-BE49-F238E27FC236}">
-                <a16:creationId xmlns:a16="http://schemas.microsoft.com/office/drawing/2014/main" id="{90A58134-26F0-8863-F12A-69E64AF16743}"/>
-              </a:ext>
-            </a:extLst>
-          </p:cNvPr>
+          <p:cNvPr id="2" name="Title 1"/>
           <p:cNvSpPr>
             <a:spLocks noGrp="1"/>
           </p:cNvSpPr>
@@ -8411,13 +7935,7 @@
       </p:sp>
       <p:sp>
         <p:nvSpPr>
-          <p:cNvPr id="4" name="Rectangle 1">
-            <a:extLst>
-              <a:ext uri="{FF2B5EF4-FFF2-40B4-BE49-F238E27FC236}">
-                <a16:creationId xmlns:a16="http://schemas.microsoft.com/office/drawing/2014/main" id="{AA93090E-6081-DC23-5F81-A82212EFBECA}"/>
-              </a:ext>
-            </a:extLst>
-          </p:cNvPr>
+          <p:cNvPr id="4" name="Rectangle 1"/>
           <p:cNvSpPr>
             <a:spLocks noGrp="1" noChangeArrowheads="1"/>
           </p:cNvSpPr>
@@ -8427,8 +7945,8 @@
         </p:nvSpPr>
         <p:spPr bwMode="auto">
           <a:xfrm>
-            <a:off x="838200" y="1795909"/>
-            <a:ext cx="4410182" cy="1323439"/>
+            <a:off x="838200" y="1796593"/>
+            <a:ext cx="4452620" cy="1322070"/>
           </a:xfrm>
           <a:prstGeom prst="rect">
             <a:avLst/>
@@ -8469,9 +7987,6 @@
         </p:spPr>
         <p:txBody>
           <a:bodyPr vert="horz" wrap="none" lIns="91440" tIns="45720" rIns="91440" bIns="45720" numCol="1" anchor="ctr" anchorCtr="0" compatLnSpc="1">
-            <a:prstTxWarp prst="textNoShape">
-              <a:avLst/>
-            </a:prstTxWarp>
             <a:spAutoFit/>
           </a:bodyPr>
           <a:lstStyle/>
@@ -8489,7 +8004,6 @@
               <a:buClrTx/>
               <a:buSzTx/>
               <a:buNone/>
-              <a:tabLst/>
             </a:pPr>
             <a:r>
               <a:rPr kumimoji="0" lang="en-US" altLang="en-US" sz="2000" b="0" i="0" u="none" strike="noStrike" cap="none" normalizeH="0" baseline="0" dirty="0" err="1">
@@ -8502,7 +8016,7 @@
                 <a:effectLst/>
                 <a:latin typeface="Arial" panose="020B0604020202020204" pitchFamily="34" charset="0"/>
               </a:rPr>
-              <a:t>Phát</a:t>
+              <a:t>-Phát</a:t>
             </a:r>
             <a:r>
               <a:rPr kumimoji="0" lang="en-US" altLang="en-US" sz="2000" b="0" i="0" u="none" strike="noStrike" cap="none" normalizeH="0" baseline="0" dirty="0">
@@ -8659,7 +8173,6 @@
               <a:buClrTx/>
               <a:buSzTx/>
               <a:buNone/>
-              <a:tabLst/>
             </a:pPr>
             <a:r>
               <a:rPr kumimoji="0" lang="en-US" altLang="en-US" sz="2000" b="0" i="0" u="none" strike="noStrike" cap="none" normalizeH="0" baseline="0" dirty="0" err="1">
@@ -8672,7 +8185,7 @@
                 <a:effectLst/>
                 <a:latin typeface="Arial" panose="020B0604020202020204" pitchFamily="34" charset="0"/>
               </a:rPr>
-              <a:t>Hoạt</a:t>
+              <a:t>-Hoạt</a:t>
             </a:r>
             <a:r>
               <a:rPr kumimoji="0" lang="en-US" altLang="en-US" sz="2000" b="0" i="0" u="none" strike="noStrike" cap="none" normalizeH="0" baseline="0" dirty="0">
@@ -8855,7 +8368,6 @@
               <a:buClrTx/>
               <a:buSzTx/>
               <a:buNone/>
-              <a:tabLst/>
             </a:pPr>
             <a:r>
               <a:rPr kumimoji="0" lang="en-US" altLang="en-US" sz="2000" b="0" i="0" u="none" strike="noStrike" cap="none" normalizeH="0" baseline="0" dirty="0" err="1">
@@ -8868,7 +8380,7 @@
                 <a:effectLst/>
                 <a:latin typeface="Arial" panose="020B0604020202020204" pitchFamily="34" charset="0"/>
               </a:rPr>
-              <a:t>Tốc</a:t>
+              <a:t>-Tốc</a:t>
             </a:r>
             <a:r>
               <a:rPr kumimoji="0" lang="en-US" altLang="en-US" sz="2000" b="0" i="0" u="none" strike="noStrike" cap="none" normalizeH="0" baseline="0" dirty="0">
@@ -8999,7 +8511,6 @@
               <a:buClrTx/>
               <a:buSzTx/>
               <a:buNone/>
-              <a:tabLst/>
             </a:pPr>
             <a:r>
               <a:rPr kumimoji="0" lang="en-US" altLang="en-US" sz="2000" b="0" i="0" u="none" strike="noStrike" cap="none" normalizeH="0" baseline="0" dirty="0" err="1">
@@ -9012,7 +8523,7 @@
                 <a:effectLst/>
                 <a:latin typeface="Arial" panose="020B0604020202020204" pitchFamily="34" charset="0"/>
               </a:rPr>
-              <a:t>Dễ</a:t>
+              <a:t>-Dễ</a:t>
             </a:r>
             <a:r>
               <a:rPr kumimoji="0" lang="en-US" altLang="en-US" sz="2000" b="0" i="0" u="none" strike="noStrike" cap="none" normalizeH="0" baseline="0" dirty="0">
@@ -9080,11 +8591,6 @@
         </p:txBody>
       </p:sp>
     </p:spTree>
-    <p:extLst>
-      <p:ext uri="{BB962C8B-B14F-4D97-AF65-F5344CB8AC3E}">
-        <p14:creationId xmlns:p14="http://schemas.microsoft.com/office/powerpoint/2010/main" val="2733264241"/>
-      </p:ext>
-    </p:extLst>
   </p:cSld>
   <p:clrMapOvr>
     <a:masterClrMapping/>
@@ -9111,13 +8617,7 @@
       </p:grpSpPr>
       <p:sp>
         <p:nvSpPr>
-          <p:cNvPr id="2" name="Title 1">
-            <a:extLst>
-              <a:ext uri="{FF2B5EF4-FFF2-40B4-BE49-F238E27FC236}">
-                <a16:creationId xmlns:a16="http://schemas.microsoft.com/office/drawing/2014/main" id="{EFF28522-5923-E513-F8DF-0CEA110505D8}"/>
-              </a:ext>
-            </a:extLst>
-          </p:cNvPr>
+          <p:cNvPr id="2" name="Title 1"/>
           <p:cNvSpPr>
             <a:spLocks noGrp="1"/>
           </p:cNvSpPr>
@@ -9145,13 +8645,7 @@
       </p:sp>
       <p:sp>
         <p:nvSpPr>
-          <p:cNvPr id="3" name="Content Placeholder 2">
-            <a:extLst>
-              <a:ext uri="{FF2B5EF4-FFF2-40B4-BE49-F238E27FC236}">
-                <a16:creationId xmlns:a16="http://schemas.microsoft.com/office/drawing/2014/main" id="{191AFFC2-D14D-B82B-AC05-7BFDE1D81362}"/>
-              </a:ext>
-            </a:extLst>
-          </p:cNvPr>
+          <p:cNvPr id="3" name="Content Placeholder 2"/>
           <p:cNvSpPr>
             <a:spLocks noGrp="1"/>
           </p:cNvSpPr>
@@ -9368,39 +8862,6 @@
               </a:rPr>
               <a:t>:</a:t>
             </a:r>
-          </a:p>
-          <a:p>
-            <a:pPr marL="0" indent="0">
-              <a:buNone/>
-            </a:pPr>
-            <a:r>
-              <a:rPr lang="en-US" sz="2000" dirty="0">
-                <a:latin typeface="Arial" panose="020B0604020202020204" pitchFamily="34" charset="0"/>
-                <a:cs typeface="Arial" panose="020B0604020202020204" pitchFamily="34" charset="0"/>
-              </a:rPr>
-              <a:t>-ID </a:t>
-            </a:r>
-            <a:r>
-              <a:rPr lang="en-US" sz="2000" dirty="0" err="1">
-                <a:latin typeface="Arial" panose="020B0604020202020204" pitchFamily="34" charset="0"/>
-                <a:cs typeface="Arial" panose="020B0604020202020204" pitchFamily="34" charset="0"/>
-              </a:rPr>
-              <a:t>người</a:t>
-            </a:r>
-            <a:r>
-              <a:rPr lang="en-US" sz="2000" dirty="0">
-                <a:latin typeface="Arial" panose="020B0604020202020204" pitchFamily="34" charset="0"/>
-                <a:cs typeface="Arial" panose="020B0604020202020204" pitchFamily="34" charset="0"/>
-              </a:rPr>
-              <a:t> </a:t>
-            </a:r>
-            <a:r>
-              <a:rPr lang="en-US" sz="2000" dirty="0" err="1">
-                <a:latin typeface="Arial" panose="020B0604020202020204" pitchFamily="34" charset="0"/>
-                <a:cs typeface="Arial" panose="020B0604020202020204" pitchFamily="34" charset="0"/>
-              </a:rPr>
-              <a:t>dùng</a:t>
-            </a:r>
             <a:endParaRPr lang="en-US" sz="2000" dirty="0">
               <a:latin typeface="Arial" panose="020B0604020202020204" pitchFamily="34" charset="0"/>
               <a:cs typeface="Arial" panose="020B0604020202020204" pitchFamily="34" charset="0"/>
@@ -9415,6 +8876,43 @@
                 <a:latin typeface="Arial" panose="020B0604020202020204" pitchFamily="34" charset="0"/>
                 <a:cs typeface="Arial" panose="020B0604020202020204" pitchFamily="34" charset="0"/>
               </a:rPr>
+              <a:t>-ID </a:t>
+            </a:r>
+            <a:r>
+              <a:rPr lang="en-US" sz="2000" dirty="0" err="1">
+                <a:latin typeface="Arial" panose="020B0604020202020204" pitchFamily="34" charset="0"/>
+                <a:cs typeface="Arial" panose="020B0604020202020204" pitchFamily="34" charset="0"/>
+              </a:rPr>
+              <a:t>người</a:t>
+            </a:r>
+            <a:r>
+              <a:rPr lang="en-US" sz="2000" dirty="0">
+                <a:latin typeface="Arial" panose="020B0604020202020204" pitchFamily="34" charset="0"/>
+                <a:cs typeface="Arial" panose="020B0604020202020204" pitchFamily="34" charset="0"/>
+              </a:rPr>
+              <a:t> </a:t>
+            </a:r>
+            <a:r>
+              <a:rPr lang="en-US" sz="2000" dirty="0" err="1">
+                <a:latin typeface="Arial" panose="020B0604020202020204" pitchFamily="34" charset="0"/>
+                <a:cs typeface="Arial" panose="020B0604020202020204" pitchFamily="34" charset="0"/>
+              </a:rPr>
+              <a:t>dùng</a:t>
+            </a:r>
+            <a:endParaRPr lang="en-US" sz="2000" dirty="0">
+              <a:latin typeface="Arial" panose="020B0604020202020204" pitchFamily="34" charset="0"/>
+              <a:cs typeface="Arial" panose="020B0604020202020204" pitchFamily="34" charset="0"/>
+            </a:endParaRPr>
+          </a:p>
+          <a:p>
+            <a:pPr marL="0" indent="0">
+              <a:buNone/>
+            </a:pPr>
+            <a:r>
+              <a:rPr lang="en-US" sz="2000" dirty="0">
+                <a:latin typeface="Arial" panose="020B0604020202020204" pitchFamily="34" charset="0"/>
+                <a:cs typeface="Arial" panose="020B0604020202020204" pitchFamily="34" charset="0"/>
+              </a:rPr>
               <a:t>-</a:t>
             </a:r>
             <a:r>
@@ -9445,6 +8943,10 @@
               </a:rPr>
               <a:t> dung</a:t>
             </a:r>
+            <a:endParaRPr lang="en-US" sz="2000" dirty="0">
+              <a:latin typeface="Arial" panose="020B0604020202020204" pitchFamily="34" charset="0"/>
+              <a:cs typeface="Arial" panose="020B0604020202020204" pitchFamily="34" charset="0"/>
+            </a:endParaRPr>
           </a:p>
           <a:p>
             <a:endParaRPr lang="en-US" dirty="0"/>
@@ -9540,6 +9042,10 @@
               </a:rPr>
               <a:t>:</a:t>
             </a:r>
+            <a:endParaRPr lang="en-US" sz="2000" dirty="0">
+              <a:latin typeface="Arial" panose="020B0604020202020204" pitchFamily="34" charset="0"/>
+              <a:cs typeface="Arial" panose="020B0604020202020204" pitchFamily="34" charset="0"/>
+            </a:endParaRPr>
           </a:p>
           <a:p>
             <a:pPr marL="0" indent="0">
@@ -10037,20 +9543,14 @@
       </p:sp>
       <p:pic>
         <p:nvPicPr>
-          <p:cNvPr id="4" name="Picture 3">
-            <a:extLst>
-              <a:ext uri="{FF2B5EF4-FFF2-40B4-BE49-F238E27FC236}">
-                <a16:creationId xmlns:a16="http://schemas.microsoft.com/office/drawing/2014/main" id="{6A2E6DDE-627E-FF1A-0AE2-D141C3328CAE}"/>
-              </a:ext>
-            </a:extLst>
-          </p:cNvPr>
+          <p:cNvPr id="4" name="Picture 3"/>
           <p:cNvPicPr>
             <a:picLocks noChangeAspect="1"/>
           </p:cNvPicPr>
           <p:nvPr/>
         </p:nvPicPr>
         <p:blipFill>
-          <a:blip r:embed="rId2">
+          <a:blip r:embed="rId1">
             <a:extLst>
               <a:ext uri="{28A0092B-C50C-407E-A947-70E740481C1C}">
                 <a14:useLocalDpi xmlns:a14="http://schemas.microsoft.com/office/drawing/2010/main" val="0"/>
@@ -10073,20 +9573,14 @@
       </p:pic>
       <p:pic>
         <p:nvPicPr>
-          <p:cNvPr id="5" name="Picture 4">
-            <a:extLst>
-              <a:ext uri="{FF2B5EF4-FFF2-40B4-BE49-F238E27FC236}">
-                <a16:creationId xmlns:a16="http://schemas.microsoft.com/office/drawing/2014/main" id="{FE2242EE-4934-8872-E767-6029B86E2091}"/>
-              </a:ext>
-            </a:extLst>
-          </p:cNvPr>
+          <p:cNvPr id="5" name="Picture 4"/>
           <p:cNvPicPr>
             <a:picLocks noChangeAspect="1"/>
           </p:cNvPicPr>
           <p:nvPr/>
         </p:nvPicPr>
         <p:blipFill>
-          <a:blip r:embed="rId3">
+          <a:blip r:embed="rId2">
             <a:extLst>
               <a:ext uri="{28A0092B-C50C-407E-A947-70E740481C1C}">
                 <a14:useLocalDpi xmlns:a14="http://schemas.microsoft.com/office/drawing/2010/main" val="0"/>
@@ -10108,11 +9602,6 @@
         </p:spPr>
       </p:pic>
     </p:spTree>
-    <p:extLst>
-      <p:ext uri="{BB962C8B-B14F-4D97-AF65-F5344CB8AC3E}">
-        <p14:creationId xmlns:p14="http://schemas.microsoft.com/office/powerpoint/2010/main" val="4146563357"/>
-      </p:ext>
-    </p:extLst>
   </p:cSld>
   <p:clrMapOvr>
     <a:masterClrMapping/>
@@ -10139,13 +9628,7 @@
       </p:grpSpPr>
       <p:sp>
         <p:nvSpPr>
-          <p:cNvPr id="2" name="Title 1">
-            <a:extLst>
-              <a:ext uri="{FF2B5EF4-FFF2-40B4-BE49-F238E27FC236}">
-                <a16:creationId xmlns:a16="http://schemas.microsoft.com/office/drawing/2014/main" id="{F97D06DA-A0A6-F6D9-7344-0903FCD5E411}"/>
-              </a:ext>
-            </a:extLst>
-          </p:cNvPr>
+          <p:cNvPr id="2" name="Title 1"/>
           <p:cNvSpPr>
             <a:spLocks noGrp="1"/>
           </p:cNvSpPr>
@@ -10184,13 +9667,7 @@
       </p:sp>
       <p:pic>
         <p:nvPicPr>
-          <p:cNvPr id="5" name="Content Placeholder 4">
-            <a:extLst>
-              <a:ext uri="{FF2B5EF4-FFF2-40B4-BE49-F238E27FC236}">
-                <a16:creationId xmlns:a16="http://schemas.microsoft.com/office/drawing/2014/main" id="{83A5457D-B5D0-A56A-C1B5-3135A24BC674}"/>
-              </a:ext>
-            </a:extLst>
-          </p:cNvPr>
+          <p:cNvPr id="5" name="Content Placeholder 4"/>
           <p:cNvPicPr>
             <a:picLocks noGrp="1" noChangeAspect="1"/>
           </p:cNvPicPr>
@@ -10199,7 +9676,7 @@
           </p:nvPr>
         </p:nvPicPr>
         <p:blipFill>
-          <a:blip r:embed="rId2">
+          <a:blip r:embed="rId1">
             <a:extLst>
               <a:ext uri="{28A0092B-C50C-407E-A947-70E740481C1C}">
                 <a14:useLocalDpi xmlns:a14="http://schemas.microsoft.com/office/drawing/2010/main" val="0"/>
@@ -10218,11 +9695,6 @@
         </p:spPr>
       </p:pic>
     </p:spTree>
-    <p:extLst>
-      <p:ext uri="{BB962C8B-B14F-4D97-AF65-F5344CB8AC3E}">
-        <p14:creationId xmlns:p14="http://schemas.microsoft.com/office/powerpoint/2010/main" val="3261603787"/>
-      </p:ext>
-    </p:extLst>
   </p:cSld>
   <p:clrMapOvr>
     <a:masterClrMapping/>
@@ -10249,13 +9721,7 @@
       </p:grpSpPr>
       <p:sp>
         <p:nvSpPr>
-          <p:cNvPr id="2" name="Title 1">
-            <a:extLst>
-              <a:ext uri="{FF2B5EF4-FFF2-40B4-BE49-F238E27FC236}">
-                <a16:creationId xmlns:a16="http://schemas.microsoft.com/office/drawing/2014/main" id="{F57ADBBC-9650-5764-7692-A6198B153AF3}"/>
-              </a:ext>
-            </a:extLst>
-          </p:cNvPr>
+          <p:cNvPr id="2" name="Title 1"/>
           <p:cNvSpPr>
             <a:spLocks noGrp="1"/>
           </p:cNvSpPr>
@@ -10283,13 +9749,7 @@
       </p:sp>
       <p:sp>
         <p:nvSpPr>
-          <p:cNvPr id="3" name="Content Placeholder 2">
-            <a:extLst>
-              <a:ext uri="{FF2B5EF4-FFF2-40B4-BE49-F238E27FC236}">
-                <a16:creationId xmlns:a16="http://schemas.microsoft.com/office/drawing/2014/main" id="{D57A04A0-E86E-8D00-7501-30D0901F20A7}"/>
-              </a:ext>
-            </a:extLst>
-          </p:cNvPr>
+          <p:cNvPr id="3" name="Content Placeholder 2"/>
           <p:cNvSpPr>
             <a:spLocks noGrp="1"/>
           </p:cNvSpPr>
@@ -10361,6 +9821,10 @@
               </a:rPr>
               <a:t>:</a:t>
             </a:r>
+            <a:endParaRPr lang="en-US" dirty="0">
+              <a:latin typeface="Arial" panose="020B0604020202020204" pitchFamily="34" charset="0"/>
+              <a:cs typeface="Arial" panose="020B0604020202020204" pitchFamily="34" charset="0"/>
+            </a:endParaRPr>
           </a:p>
           <a:p>
             <a:pPr marL="0" indent="0">
@@ -10457,6 +9921,10 @@
               </a:rPr>
               <a:t> webcam.</a:t>
             </a:r>
+            <a:endParaRPr lang="en-US" dirty="0">
+              <a:latin typeface="Arial" panose="020B0604020202020204" pitchFamily="34" charset="0"/>
+              <a:cs typeface="Arial" panose="020B0604020202020204" pitchFamily="34" charset="0"/>
+            </a:endParaRPr>
           </a:p>
           <a:p>
             <a:pPr marL="0" indent="0">
@@ -10595,6 +10063,10 @@
               </a:rPr>
               <a:t>.</a:t>
             </a:r>
+            <a:endParaRPr lang="en-US" dirty="0">
+              <a:latin typeface="Arial" panose="020B0604020202020204" pitchFamily="34" charset="0"/>
+              <a:cs typeface="Arial" panose="020B0604020202020204" pitchFamily="34" charset="0"/>
+            </a:endParaRPr>
           </a:p>
           <a:p>
             <a:pPr marL="0" indent="0">
@@ -10719,6 +10191,10 @@
               </a:rPr>
               <a:t>.</a:t>
             </a:r>
+            <a:endParaRPr lang="en-US" dirty="0">
+              <a:latin typeface="Arial" panose="020B0604020202020204" pitchFamily="34" charset="0"/>
+              <a:cs typeface="Arial" panose="020B0604020202020204" pitchFamily="34" charset="0"/>
+            </a:endParaRPr>
           </a:p>
           <a:p>
             <a:pPr marL="0" indent="0">
@@ -10885,6 +10361,10 @@
               </a:rPr>
               <a:t>.</a:t>
             </a:r>
+            <a:endParaRPr lang="en-US" dirty="0">
+              <a:latin typeface="Arial" panose="020B0604020202020204" pitchFamily="34" charset="0"/>
+              <a:cs typeface="Arial" panose="020B0604020202020204" pitchFamily="34" charset="0"/>
+            </a:endParaRPr>
           </a:p>
           <a:p>
             <a:endParaRPr lang="en-US" dirty="0"/>
@@ -10892,11 +10372,6 @@
         </p:txBody>
       </p:sp>
     </p:spTree>
-    <p:extLst>
-      <p:ext uri="{BB962C8B-B14F-4D97-AF65-F5344CB8AC3E}">
-        <p14:creationId xmlns:p14="http://schemas.microsoft.com/office/powerpoint/2010/main" val="1511191867"/>
-      </p:ext>
-    </p:extLst>
   </p:cSld>
   <p:clrMapOvr>
     <a:masterClrMapping/>
@@ -10923,13 +10398,7 @@
       </p:grpSpPr>
       <p:sp>
         <p:nvSpPr>
-          <p:cNvPr id="2" name="Title 1">
-            <a:extLst>
-              <a:ext uri="{FF2B5EF4-FFF2-40B4-BE49-F238E27FC236}">
-                <a16:creationId xmlns:a16="http://schemas.microsoft.com/office/drawing/2014/main" id="{2DC5494F-5A76-2BBA-5780-CC5513514397}"/>
-              </a:ext>
-            </a:extLst>
-          </p:cNvPr>
+          <p:cNvPr id="2" name="Title 1"/>
           <p:cNvSpPr>
             <a:spLocks noGrp="1"/>
           </p:cNvSpPr>
@@ -10957,13 +10426,7 @@
       </p:sp>
       <p:sp>
         <p:nvSpPr>
-          <p:cNvPr id="3" name="Content Placeholder 2">
-            <a:extLst>
-              <a:ext uri="{FF2B5EF4-FFF2-40B4-BE49-F238E27FC236}">
-                <a16:creationId xmlns:a16="http://schemas.microsoft.com/office/drawing/2014/main" id="{AA2EBB77-4B8C-82CA-1CDE-DCDE12AFE2EF}"/>
-              </a:ext>
-            </a:extLst>
-          </p:cNvPr>
+          <p:cNvPr id="3" name="Content Placeholder 2"/>
           <p:cNvSpPr>
             <a:spLocks noGrp="1"/>
           </p:cNvSpPr>
@@ -11648,6 +11111,10 @@
               </a:rPr>
               <a:t>.</a:t>
             </a:r>
+            <a:endParaRPr lang="en-US" sz="2000" dirty="0">
+              <a:latin typeface="Arial" panose="020B0604020202020204" pitchFamily="34" charset="0"/>
+              <a:cs typeface="Arial" panose="020B0604020202020204" pitchFamily="34" charset="0"/>
+            </a:endParaRPr>
           </a:p>
           <a:p>
             <a:pPr marL="0" indent="0">
@@ -12376,6 +11843,10 @@
               </a:rPr>
               <a:t>.</a:t>
             </a:r>
+            <a:endParaRPr lang="en-US" sz="2000" dirty="0">
+              <a:latin typeface="Arial" panose="020B0604020202020204" pitchFamily="34" charset="0"/>
+              <a:cs typeface="Arial" panose="020B0604020202020204" pitchFamily="34" charset="0"/>
+            </a:endParaRPr>
           </a:p>
           <a:p>
             <a:pPr marL="0" indent="0">
@@ -12992,6 +12463,10 @@
               </a:rPr>
               <a:t>.</a:t>
             </a:r>
+            <a:endParaRPr lang="en-US" sz="2400" dirty="0">
+              <a:latin typeface="Arial" panose="020B0604020202020204" pitchFamily="34" charset="0"/>
+              <a:cs typeface="Arial" panose="020B0604020202020204" pitchFamily="34" charset="0"/>
+            </a:endParaRPr>
           </a:p>
           <a:p>
             <a:pPr marL="0" indent="0">
@@ -13536,6 +13011,10 @@
               </a:rPr>
               <a:t> lai.</a:t>
             </a:r>
+            <a:endParaRPr lang="en-US" sz="2400" dirty="0">
+              <a:latin typeface="Arial" panose="020B0604020202020204" pitchFamily="34" charset="0"/>
+              <a:cs typeface="Arial" panose="020B0604020202020204" pitchFamily="34" charset="0"/>
+            </a:endParaRPr>
           </a:p>
           <a:p>
             <a:endParaRPr lang="en-US" dirty="0"/>
@@ -13543,11 +13022,6 @@
         </p:txBody>
       </p:sp>
     </p:spTree>
-    <p:extLst>
-      <p:ext uri="{BB962C8B-B14F-4D97-AF65-F5344CB8AC3E}">
-        <p14:creationId xmlns:p14="http://schemas.microsoft.com/office/powerpoint/2010/main" val="539448910"/>
-      </p:ext>
-    </p:extLst>
   </p:cSld>
   <p:clrMapOvr>
     <a:masterClrMapping/>
@@ -13574,13 +13048,7 @@
       </p:grpSpPr>
       <p:sp>
         <p:nvSpPr>
-          <p:cNvPr id="2" name="Title 1">
-            <a:extLst>
-              <a:ext uri="{FF2B5EF4-FFF2-40B4-BE49-F238E27FC236}">
-                <a16:creationId xmlns:a16="http://schemas.microsoft.com/office/drawing/2014/main" id="{4CA13017-8B49-C57D-9D71-B896D5FD7068}"/>
-              </a:ext>
-            </a:extLst>
-          </p:cNvPr>
+          <p:cNvPr id="2" name="Title 1"/>
           <p:cNvSpPr>
             <a:spLocks noGrp="1"/>
           </p:cNvSpPr>
@@ -13609,13 +13077,7 @@
       </p:sp>
       <p:pic>
         <p:nvPicPr>
-          <p:cNvPr id="5" name="Content Placeholder 4">
-            <a:extLst>
-              <a:ext uri="{FF2B5EF4-FFF2-40B4-BE49-F238E27FC236}">
-                <a16:creationId xmlns:a16="http://schemas.microsoft.com/office/drawing/2014/main" id="{22365329-9310-1105-8763-68C92F3EE173}"/>
-              </a:ext>
-            </a:extLst>
-          </p:cNvPr>
+          <p:cNvPr id="5" name="Content Placeholder 4"/>
           <p:cNvPicPr>
             <a:picLocks noGrp="1" noChangeAspect="1"/>
           </p:cNvPicPr>
@@ -13624,7 +13086,7 @@
           </p:nvPr>
         </p:nvPicPr>
         <p:blipFill>
-          <a:blip r:embed="rId2">
+          <a:blip r:embed="rId1">
             <a:extLst>
               <a:ext uri="{28A0092B-C50C-407E-A947-70E740481C1C}">
                 <a14:useLocalDpi xmlns:a14="http://schemas.microsoft.com/office/drawing/2010/main" val="0"/>
@@ -13643,11 +13105,6 @@
         </p:spPr>
       </p:pic>
     </p:spTree>
-    <p:extLst>
-      <p:ext uri="{BB962C8B-B14F-4D97-AF65-F5344CB8AC3E}">
-        <p14:creationId xmlns:p14="http://schemas.microsoft.com/office/powerpoint/2010/main" val="3620550503"/>
-      </p:ext>
-    </p:extLst>
   </p:cSld>
   <p:clrMapOvr>
     <a:masterClrMapping/>
@@ -13674,13 +13131,7 @@
       </p:grpSpPr>
       <p:sp>
         <p:nvSpPr>
-          <p:cNvPr id="2" name="Title 1">
-            <a:extLst>
-              <a:ext uri="{FF2B5EF4-FFF2-40B4-BE49-F238E27FC236}">
-                <a16:creationId xmlns:a16="http://schemas.microsoft.com/office/drawing/2014/main" id="{ADAEE180-9816-2570-436C-D721222D2322}"/>
-              </a:ext>
-            </a:extLst>
-          </p:cNvPr>
+          <p:cNvPr id="2" name="Title 1"/>
           <p:cNvSpPr>
             <a:spLocks noGrp="1"/>
           </p:cNvSpPr>
@@ -13708,13 +13159,7 @@
       </p:sp>
       <p:sp>
         <p:nvSpPr>
-          <p:cNvPr id="3" name="Content Placeholder 2">
-            <a:extLst>
-              <a:ext uri="{FF2B5EF4-FFF2-40B4-BE49-F238E27FC236}">
-                <a16:creationId xmlns:a16="http://schemas.microsoft.com/office/drawing/2014/main" id="{F459A578-C142-E38A-00FD-BD6C21B7DEE3}"/>
-              </a:ext>
-            </a:extLst>
-          </p:cNvPr>
+          <p:cNvPr id="3" name="Content Placeholder 2"/>
           <p:cNvSpPr>
             <a:spLocks noGrp="1"/>
           </p:cNvSpPr>
@@ -14367,6 +13812,10 @@
               </a:rPr>
               <a:t>.</a:t>
             </a:r>
+            <a:endParaRPr lang="en-US" sz="2000" dirty="0">
+              <a:latin typeface="Arial" panose="020B0604020202020204" pitchFamily="34" charset="0"/>
+              <a:cs typeface="Arial" panose="020B0604020202020204" pitchFamily="34" charset="0"/>
+            </a:endParaRPr>
           </a:p>
           <a:p>
             <a:pPr marL="0" indent="0">
@@ -14999,11 +14448,6 @@
         </p:txBody>
       </p:sp>
     </p:spTree>
-    <p:extLst>
-      <p:ext uri="{BB962C8B-B14F-4D97-AF65-F5344CB8AC3E}">
-        <p14:creationId xmlns:p14="http://schemas.microsoft.com/office/powerpoint/2010/main" val="3019571564"/>
-      </p:ext>
-    </p:extLst>
   </p:cSld>
   <p:clrMapOvr>
     <a:masterClrMapping/>
@@ -15030,13 +14474,7 @@
       </p:grpSpPr>
       <p:sp>
         <p:nvSpPr>
-          <p:cNvPr id="2" name="Title 1">
-            <a:extLst>
-              <a:ext uri="{FF2B5EF4-FFF2-40B4-BE49-F238E27FC236}">
-                <a16:creationId xmlns:a16="http://schemas.microsoft.com/office/drawing/2014/main" id="{0DDAB1B1-3306-66A8-5A61-86F95BE05531}"/>
-              </a:ext>
-            </a:extLst>
-          </p:cNvPr>
+          <p:cNvPr id="2" name="Title 1"/>
           <p:cNvSpPr>
             <a:spLocks noGrp="1"/>
           </p:cNvSpPr>
@@ -15069,13 +14507,7 @@
       </p:sp>
       <p:pic>
         <p:nvPicPr>
-          <p:cNvPr id="5" name="Content Placeholder 4">
-            <a:extLst>
-              <a:ext uri="{FF2B5EF4-FFF2-40B4-BE49-F238E27FC236}">
-                <a16:creationId xmlns:a16="http://schemas.microsoft.com/office/drawing/2014/main" id="{6FD6FBC6-62FB-73E7-B902-CD16A76CCB43}"/>
-              </a:ext>
-            </a:extLst>
-          </p:cNvPr>
+          <p:cNvPr id="5" name="Content Placeholder 4"/>
           <p:cNvPicPr>
             <a:picLocks noGrp="1" noChangeAspect="1"/>
           </p:cNvPicPr>
@@ -15084,7 +14516,7 @@
           </p:nvPr>
         </p:nvPicPr>
         <p:blipFill>
-          <a:blip r:embed="rId2">
+          <a:blip r:embed="rId1">
             <a:extLst>
               <a:ext uri="{28A0092B-C50C-407E-A947-70E740481C1C}">
                 <a14:useLocalDpi xmlns:a14="http://schemas.microsoft.com/office/drawing/2010/main" val="0"/>
@@ -15103,11 +14535,6 @@
         </p:spPr>
       </p:pic>
     </p:spTree>
-    <p:extLst>
-      <p:ext uri="{BB962C8B-B14F-4D97-AF65-F5344CB8AC3E}">
-        <p14:creationId xmlns:p14="http://schemas.microsoft.com/office/powerpoint/2010/main" val="1122059507"/>
-      </p:ext>
-    </p:extLst>
   </p:cSld>
   <p:clrMapOvr>
     <a:masterClrMapping/>
@@ -15134,13 +14561,7 @@
       </p:grpSpPr>
       <p:sp>
         <p:nvSpPr>
-          <p:cNvPr id="2" name="Title 1">
-            <a:extLst>
-              <a:ext uri="{FF2B5EF4-FFF2-40B4-BE49-F238E27FC236}">
-                <a16:creationId xmlns:a16="http://schemas.microsoft.com/office/drawing/2014/main" id="{DC143371-6044-EA5D-7BB4-728EB6B1C068}"/>
-              </a:ext>
-            </a:extLst>
-          </p:cNvPr>
+          <p:cNvPr id="2" name="Title 1"/>
           <p:cNvSpPr>
             <a:spLocks noGrp="1"/>
           </p:cNvSpPr>
@@ -15177,13 +14598,7 @@
       </p:sp>
       <p:sp>
         <p:nvSpPr>
-          <p:cNvPr id="3" name="Content Placeholder 2">
-            <a:extLst>
-              <a:ext uri="{FF2B5EF4-FFF2-40B4-BE49-F238E27FC236}">
-                <a16:creationId xmlns:a16="http://schemas.microsoft.com/office/drawing/2014/main" id="{053D1FDD-406D-4B3E-65EB-4BF64531B14D}"/>
-              </a:ext>
-            </a:extLst>
-          </p:cNvPr>
+          <p:cNvPr id="3" name="Content Placeholder 2"/>
           <p:cNvSpPr>
             <a:spLocks noGrp="1"/>
           </p:cNvSpPr>
@@ -16179,6 +15594,10 @@
               </a:rPr>
               <a:t>.</a:t>
             </a:r>
+            <a:endParaRPr lang="en-US" sz="2000" dirty="0">
+              <a:latin typeface="Arial" panose="020B0604020202020204" pitchFamily="34" charset="0"/>
+              <a:cs typeface="Arial" panose="020B0604020202020204" pitchFamily="34" charset="0"/>
+            </a:endParaRPr>
           </a:p>
           <a:p>
             <a:endParaRPr lang="en-US" dirty="0"/>
@@ -16186,11 +15605,6 @@
         </p:txBody>
       </p:sp>
     </p:spTree>
-    <p:extLst>
-      <p:ext uri="{BB962C8B-B14F-4D97-AF65-F5344CB8AC3E}">
-        <p14:creationId xmlns:p14="http://schemas.microsoft.com/office/powerpoint/2010/main" val="3232052580"/>
-      </p:ext>
-    </p:extLst>
   </p:cSld>
   <p:clrMapOvr>
     <a:masterClrMapping/>
@@ -16217,13 +15631,7 @@
       </p:grpSpPr>
       <p:sp>
         <p:nvSpPr>
-          <p:cNvPr id="2" name="Title 1">
-            <a:extLst>
-              <a:ext uri="{FF2B5EF4-FFF2-40B4-BE49-F238E27FC236}">
-                <a16:creationId xmlns:a16="http://schemas.microsoft.com/office/drawing/2014/main" id="{1761F0E4-8300-8A6D-91F5-208B0D0605DD}"/>
-              </a:ext>
-            </a:extLst>
-          </p:cNvPr>
+          <p:cNvPr id="2" name="Title 1"/>
           <p:cNvSpPr>
             <a:spLocks noGrp="1"/>
           </p:cNvSpPr>
@@ -16251,13 +15659,7 @@
       </p:sp>
       <p:sp>
         <p:nvSpPr>
-          <p:cNvPr id="3" name="Content Placeholder 2">
-            <a:extLst>
-              <a:ext uri="{FF2B5EF4-FFF2-40B4-BE49-F238E27FC236}">
-                <a16:creationId xmlns:a16="http://schemas.microsoft.com/office/drawing/2014/main" id="{2A1DD9DB-EB94-B663-FB05-E5A5C6C06CCB}"/>
-              </a:ext>
-            </a:extLst>
-          </p:cNvPr>
+          <p:cNvPr id="3" name="Content Placeholder 2"/>
           <p:cNvSpPr>
             <a:spLocks noGrp="1"/>
           </p:cNvSpPr>
@@ -16546,6 +15948,10 @@
               </a:rPr>
               <a:t>:</a:t>
             </a:r>
+            <a:endParaRPr lang="en-US" sz="2000" dirty="0">
+              <a:latin typeface="Arial" panose="020B0604020202020204" pitchFamily="34" charset="0"/>
+              <a:cs typeface="Arial" panose="020B0604020202020204" pitchFamily="34" charset="0"/>
+            </a:endParaRPr>
           </a:p>
           <a:p>
             <a:pPr marL="0" indent="0">
@@ -16656,6 +16062,10 @@
               </a:rPr>
               <a:t> (Deep Learning).</a:t>
             </a:r>
+            <a:endParaRPr lang="en-US" sz="2000" dirty="0">
+              <a:latin typeface="Arial" panose="020B0604020202020204" pitchFamily="34" charset="0"/>
+              <a:cs typeface="Arial" panose="020B0604020202020204" pitchFamily="34" charset="0"/>
+            </a:endParaRPr>
           </a:p>
           <a:p>
             <a:pPr marL="0" indent="0">
@@ -16836,6 +16246,10 @@
               </a:rPr>
               <a:t> .</a:t>
             </a:r>
+            <a:endParaRPr lang="en-US" sz="2000" dirty="0">
+              <a:latin typeface="Arial" panose="020B0604020202020204" pitchFamily="34" charset="0"/>
+              <a:cs typeface="Arial" panose="020B0604020202020204" pitchFamily="34" charset="0"/>
+            </a:endParaRPr>
           </a:p>
           <a:p>
             <a:pPr marL="0" indent="0">
@@ -17086,6 +16500,10 @@
               </a:rPr>
               <a:t>.</a:t>
             </a:r>
+            <a:endParaRPr lang="en-US" sz="2000" dirty="0">
+              <a:latin typeface="Arial" panose="020B0604020202020204" pitchFamily="34" charset="0"/>
+              <a:cs typeface="Arial" panose="020B0604020202020204" pitchFamily="34" charset="0"/>
+            </a:endParaRPr>
           </a:p>
           <a:p>
             <a:pPr marL="0" indent="0">
@@ -17168,6 +16586,10 @@
               </a:rPr>
               <a:t> dung.</a:t>
             </a:r>
+            <a:endParaRPr lang="en-US" sz="2000" dirty="0">
+              <a:latin typeface="Arial" panose="020B0604020202020204" pitchFamily="34" charset="0"/>
+              <a:cs typeface="Arial" panose="020B0604020202020204" pitchFamily="34" charset="0"/>
+            </a:endParaRPr>
           </a:p>
           <a:p>
             <a:pPr marL="0" indent="0">
@@ -17320,6 +16742,10 @@
               </a:rPr>
               <a:t>.</a:t>
             </a:r>
+            <a:endParaRPr lang="en-US" sz="2000" dirty="0">
+              <a:latin typeface="Arial" panose="020B0604020202020204" pitchFamily="34" charset="0"/>
+              <a:cs typeface="Arial" panose="020B0604020202020204" pitchFamily="34" charset="0"/>
+            </a:endParaRPr>
           </a:p>
           <a:p>
             <a:pPr marL="0" indent="0">
@@ -17486,6 +16912,10 @@
               </a:rPr>
               <a:t>.</a:t>
             </a:r>
+            <a:endParaRPr lang="en-US" sz="2000" dirty="0">
+              <a:latin typeface="Arial" panose="020B0604020202020204" pitchFamily="34" charset="0"/>
+              <a:cs typeface="Arial" panose="020B0604020202020204" pitchFamily="34" charset="0"/>
+            </a:endParaRPr>
           </a:p>
           <a:p>
             <a:endParaRPr lang="en-US" dirty="0"/>
@@ -17493,11 +16923,73 @@
         </p:txBody>
       </p:sp>
     </p:spTree>
-    <p:extLst>
-      <p:ext uri="{BB962C8B-B14F-4D97-AF65-F5344CB8AC3E}">
-        <p14:creationId xmlns:p14="http://schemas.microsoft.com/office/powerpoint/2010/main" val="3540601543"/>
-      </p:ext>
-    </p:extLst>
+  </p:cSld>
+  <p:clrMapOvr>
+    <a:masterClrMapping/>
+  </p:clrMapOvr>
+</p:sld>
+</file>
+
+<file path=ppt/slides/slide24.xml><?xml version="1.0" encoding="utf-8"?>
+<p:sld xmlns:a="http://schemas.openxmlformats.org/drawingml/2006/main" xmlns:r="http://schemas.openxmlformats.org/officeDocument/2006/relationships" xmlns:p="http://schemas.openxmlformats.org/presentationml/2006/main">
+  <p:cSld>
+    <p:spTree>
+      <p:nvGrpSpPr>
+        <p:cNvPr id="1" name=""/>
+        <p:cNvGrpSpPr/>
+        <p:nvPr/>
+      </p:nvGrpSpPr>
+      <p:grpSpPr/>
+      <p:sp>
+        <p:nvSpPr>
+          <p:cNvPr id="2" name="Title 1"/>
+          <p:cNvSpPr>
+            <a:spLocks noGrp="1"/>
+          </p:cNvSpPr>
+          <p:nvPr>
+            <p:ph type="title"/>
+          </p:nvPr>
+        </p:nvSpPr>
+        <p:spPr/>
+        <p:txBody>
+          <a:bodyPr/>
+          <a:p>
+            <a:endParaRPr lang="en-US"/>
+          </a:p>
+        </p:txBody>
+      </p:sp>
+      <p:sp>
+        <p:nvSpPr>
+          <p:cNvPr id="3" name="Content Placeholder 2"/>
+          <p:cNvSpPr>
+            <a:spLocks noGrp="1"/>
+          </p:cNvSpPr>
+          <p:nvPr>
+            <p:ph idx="1"/>
+          </p:nvPr>
+        </p:nvSpPr>
+        <p:spPr/>
+        <p:txBody>
+          <a:bodyPr/>
+          <a:p>
+            <a:pPr marL="0" indent="0" algn="ctr">
+              <a:buNone/>
+            </a:pPr>
+            <a:r>
+              <a:rPr lang="en-US" sz="8000" b="1">
+                <a:latin typeface="Arial" panose="020B0604020202020204" pitchFamily="34" charset="0"/>
+                <a:cs typeface="Arial" panose="020B0604020202020204" pitchFamily="34" charset="0"/>
+              </a:rPr>
+              <a:t>THANKS YOU</a:t>
+            </a:r>
+            <a:endParaRPr lang="en-US" sz="8000" b="1">
+              <a:latin typeface="Arial" panose="020B0604020202020204" pitchFamily="34" charset="0"/>
+              <a:cs typeface="Arial" panose="020B0604020202020204" pitchFamily="34" charset="0"/>
+            </a:endParaRPr>
+          </a:p>
+        </p:txBody>
+      </p:sp>
+    </p:spTree>
   </p:cSld>
   <p:clrMapOvr>
     <a:masterClrMapping/>
@@ -17524,13 +17016,7 @@
       </p:grpSpPr>
       <p:sp>
         <p:nvSpPr>
-          <p:cNvPr id="2" name="Title 1">
-            <a:extLst>
-              <a:ext uri="{FF2B5EF4-FFF2-40B4-BE49-F238E27FC236}">
-                <a16:creationId xmlns:a16="http://schemas.microsoft.com/office/drawing/2014/main" id="{474509EB-09F5-98E4-AB34-6A53320306BB}"/>
-              </a:ext>
-            </a:extLst>
-          </p:cNvPr>
+          <p:cNvPr id="2" name="Title 1"/>
           <p:cNvSpPr>
             <a:spLocks noGrp="1"/>
           </p:cNvSpPr>
@@ -17552,18 +17038,16 @@
               </a:rPr>
               <a:t>GIỚI THIỆU ĐỀ TÀI</a:t>
             </a:r>
+            <a:endParaRPr lang="en-US" sz="3200" b="1" dirty="0">
+              <a:latin typeface="Arial" panose="020B0604020202020204" pitchFamily="34" charset="0"/>
+              <a:cs typeface="Arial" panose="020B0604020202020204" pitchFamily="34" charset="0"/>
+            </a:endParaRPr>
           </a:p>
         </p:txBody>
       </p:sp>
       <p:sp>
         <p:nvSpPr>
-          <p:cNvPr id="3" name="Content Placeholder 2">
-            <a:extLst>
-              <a:ext uri="{FF2B5EF4-FFF2-40B4-BE49-F238E27FC236}">
-                <a16:creationId xmlns:a16="http://schemas.microsoft.com/office/drawing/2014/main" id="{6F31C2EC-1C6D-8085-A543-E75893EDADCC}"/>
-              </a:ext>
-            </a:extLst>
-          </p:cNvPr>
+          <p:cNvPr id="3" name="Content Placeholder 2"/>
           <p:cNvSpPr>
             <a:spLocks noGrp="1"/>
           </p:cNvSpPr>
@@ -17767,6 +17251,10 @@
               </a:rPr>
               <a:t> webcam</a:t>
             </a:r>
+            <a:endParaRPr lang="en-US" sz="2000" dirty="0">
+              <a:latin typeface="Arial" panose="020B0604020202020204" pitchFamily="34" charset="0"/>
+              <a:cs typeface="Arial" panose="020B0604020202020204" pitchFamily="34" charset="0"/>
+            </a:endParaRPr>
           </a:p>
           <a:p>
             <a:pPr marL="0" indent="0">
@@ -18993,6 +18481,10 @@
               </a:rPr>
               <a:t> lai.</a:t>
             </a:r>
+            <a:endParaRPr lang="en-US" sz="1800" dirty="0">
+              <a:latin typeface="Arial" panose="020B0604020202020204" pitchFamily="34" charset="0"/>
+              <a:cs typeface="Arial" panose="020B0604020202020204" pitchFamily="34" charset="0"/>
+            </a:endParaRPr>
           </a:p>
           <a:p>
             <a:endParaRPr lang="en-US" dirty="0"/>
@@ -19001,20 +18493,14 @@
       </p:sp>
       <p:pic>
         <p:nvPicPr>
-          <p:cNvPr id="5" name="Picture 4">
-            <a:extLst>
-              <a:ext uri="{FF2B5EF4-FFF2-40B4-BE49-F238E27FC236}">
-                <a16:creationId xmlns:a16="http://schemas.microsoft.com/office/drawing/2014/main" id="{5CCD50CF-5B19-8FB7-252B-77C9F0752F86}"/>
-              </a:ext>
-            </a:extLst>
-          </p:cNvPr>
+          <p:cNvPr id="5" name="Picture 4"/>
           <p:cNvPicPr>
             <a:picLocks noChangeAspect="1"/>
           </p:cNvPicPr>
           <p:nvPr/>
         </p:nvPicPr>
         <p:blipFill>
-          <a:blip r:embed="rId2">
+          <a:blip r:embed="rId1">
             <a:extLst>
               <a:ext uri="{28A0092B-C50C-407E-A947-70E740481C1C}">
                 <a14:useLocalDpi xmlns:a14="http://schemas.microsoft.com/office/drawing/2010/main" val="0"/>
@@ -19036,11 +18522,6 @@
         </p:spPr>
       </p:pic>
     </p:spTree>
-    <p:extLst>
-      <p:ext uri="{BB962C8B-B14F-4D97-AF65-F5344CB8AC3E}">
-        <p14:creationId xmlns:p14="http://schemas.microsoft.com/office/powerpoint/2010/main" val="1814961529"/>
-      </p:ext>
-    </p:extLst>
   </p:cSld>
   <p:clrMapOvr>
     <a:masterClrMapping/>
@@ -19067,13 +18548,7 @@
       </p:grpSpPr>
       <p:sp>
         <p:nvSpPr>
-          <p:cNvPr id="2" name="Title 1">
-            <a:extLst>
-              <a:ext uri="{FF2B5EF4-FFF2-40B4-BE49-F238E27FC236}">
-                <a16:creationId xmlns:a16="http://schemas.microsoft.com/office/drawing/2014/main" id="{5CA2A4E2-6E97-D90F-D9BB-39E6B6605561}"/>
-              </a:ext>
-            </a:extLst>
-          </p:cNvPr>
+          <p:cNvPr id="2" name="Title 1"/>
           <p:cNvSpPr>
             <a:spLocks noGrp="1"/>
           </p:cNvSpPr>
@@ -19095,18 +18570,16 @@
               </a:rPr>
               <a:t>ĐẶT VẤN ĐỀ</a:t>
             </a:r>
+            <a:endParaRPr lang="en-US" sz="3200" b="1" dirty="0">
+              <a:latin typeface="Arial" panose="020B0604020202020204" pitchFamily="34" charset="0"/>
+              <a:cs typeface="Arial" panose="020B0604020202020204" pitchFamily="34" charset="0"/>
+            </a:endParaRPr>
           </a:p>
         </p:txBody>
       </p:sp>
       <p:sp>
         <p:nvSpPr>
-          <p:cNvPr id="4" name="Rectangle 1">
-            <a:extLst>
-              <a:ext uri="{FF2B5EF4-FFF2-40B4-BE49-F238E27FC236}">
-                <a16:creationId xmlns:a16="http://schemas.microsoft.com/office/drawing/2014/main" id="{967D37A3-F7A1-9AB3-A64E-9616611F9AFD}"/>
-              </a:ext>
-            </a:extLst>
-          </p:cNvPr>
+          <p:cNvPr id="4" name="Rectangle 1"/>
           <p:cNvSpPr>
             <a:spLocks noGrp="1" noChangeArrowheads="1"/>
           </p:cNvSpPr>
@@ -19158,9 +18631,6 @@
         </p:spPr>
         <p:txBody>
           <a:bodyPr vert="horz" wrap="square" lIns="91440" tIns="45720" rIns="91440" bIns="45720" numCol="1" anchor="ctr" anchorCtr="0" compatLnSpc="1">
-            <a:prstTxWarp prst="textNoShape">
-              <a:avLst/>
-            </a:prstTxWarp>
             <a:spAutoFit/>
           </a:bodyPr>
           <a:lstStyle/>
@@ -19436,6 +18906,10 @@
               </a:rPr>
               <a:t> </a:t>
             </a:r>
+            <a:endParaRPr lang="en-US" sz="2000" dirty="0">
+              <a:latin typeface="Arial" panose="020B0604020202020204" pitchFamily="34" charset="0"/>
+              <a:cs typeface="Arial" panose="020B0604020202020204" pitchFamily="34" charset="0"/>
+            </a:endParaRPr>
           </a:p>
           <a:p>
             <a:pPr marL="0" lvl="0" indent="0" eaLnBrk="0" fontAlgn="base" hangingPunct="0">
@@ -19962,7 +19436,6 @@
               <a:buClrTx/>
               <a:buSzTx/>
               <a:buNone/>
-              <a:tabLst/>
             </a:pPr>
             <a:endParaRPr kumimoji="0" lang="en-US" altLang="en-US" sz="2000" b="0" i="0" u="none" strike="noStrike" cap="none" normalizeH="0" baseline="0" dirty="0">
               <a:ln>
@@ -19989,7 +19462,6 @@
               <a:buClrTx/>
               <a:buSzTx/>
               <a:buNone/>
-              <a:tabLst/>
             </a:pPr>
             <a:r>
               <a:rPr kumimoji="0" lang="en-US" altLang="en-US" sz="2000" b="0" i="0" u="none" strike="noStrike" cap="none" normalizeH="0" baseline="0" dirty="0" err="1">
@@ -20198,127 +19670,6 @@
                 <a:latin typeface="Arial" panose="020B0604020202020204" pitchFamily="34" charset="0"/>
               </a:rPr>
               <a:t>:</a:t>
-            </a:r>
-          </a:p>
-          <a:p>
-            <a:pPr marL="0" marR="0" lvl="0" indent="0" algn="l" defTabSz="914400" rtl="0" eaLnBrk="0" fontAlgn="base" latinLnBrk="0" hangingPunct="0">
-              <a:lnSpc>
-                <a:spcPct val="100000"/>
-              </a:lnSpc>
-              <a:spcBef>
-                <a:spcPct val="0"/>
-              </a:spcBef>
-              <a:spcAft>
-                <a:spcPct val="0"/>
-              </a:spcAft>
-              <a:buClrTx/>
-              <a:buSzTx/>
-              <a:buNone/>
-              <a:tabLst/>
-            </a:pPr>
-            <a:r>
-              <a:rPr kumimoji="0" lang="en-US" altLang="en-US" sz="2000" b="0" i="0" u="none" strike="noStrike" cap="none" normalizeH="0" baseline="0" dirty="0">
-                <a:ln>
-                  <a:noFill/>
-                </a:ln>
-                <a:solidFill>
-                  <a:schemeClr val="tx1"/>
-                </a:solidFill>
-                <a:effectLst/>
-                <a:latin typeface="Arial" panose="020B0604020202020204" pitchFamily="34" charset="0"/>
-              </a:rPr>
-              <a:t>-</a:t>
-            </a:r>
-            <a:r>
-              <a:rPr kumimoji="0" lang="en-US" altLang="en-US" sz="2000" b="0" i="0" u="none" strike="noStrike" cap="none" normalizeH="0" baseline="0" dirty="0" err="1">
-                <a:ln>
-                  <a:noFill/>
-                </a:ln>
-                <a:solidFill>
-                  <a:schemeClr val="tx1"/>
-                </a:solidFill>
-                <a:effectLst/>
-                <a:latin typeface="Arial" panose="020B0604020202020204" pitchFamily="34" charset="0"/>
-              </a:rPr>
-              <a:t>Nhận</a:t>
-            </a:r>
-            <a:r>
-              <a:rPr kumimoji="0" lang="en-US" altLang="en-US" sz="2000" b="0" i="0" u="none" strike="noStrike" cap="none" normalizeH="0" baseline="0" dirty="0">
-                <a:ln>
-                  <a:noFill/>
-                </a:ln>
-                <a:solidFill>
-                  <a:schemeClr val="tx1"/>
-                </a:solidFill>
-                <a:effectLst/>
-                <a:latin typeface="Arial" panose="020B0604020202020204" pitchFamily="34" charset="0"/>
-              </a:rPr>
-              <a:t> </a:t>
-            </a:r>
-            <a:r>
-              <a:rPr kumimoji="0" lang="en-US" altLang="en-US" sz="2000" b="0" i="0" u="none" strike="noStrike" cap="none" normalizeH="0" baseline="0" dirty="0" err="1">
-                <a:ln>
-                  <a:noFill/>
-                </a:ln>
-                <a:solidFill>
-                  <a:schemeClr val="tx1"/>
-                </a:solidFill>
-                <a:effectLst/>
-                <a:latin typeface="Arial" panose="020B0604020202020204" pitchFamily="34" charset="0"/>
-              </a:rPr>
-              <a:t>diện</a:t>
-            </a:r>
-            <a:r>
-              <a:rPr kumimoji="0" lang="en-US" altLang="en-US" sz="2000" b="0" i="0" u="none" strike="noStrike" cap="none" normalizeH="0" baseline="0" dirty="0">
-                <a:ln>
-                  <a:noFill/>
-                </a:ln>
-                <a:solidFill>
-                  <a:schemeClr val="tx1"/>
-                </a:solidFill>
-                <a:effectLst/>
-                <a:latin typeface="Arial" panose="020B0604020202020204" pitchFamily="34" charset="0"/>
-              </a:rPr>
-              <a:t> </a:t>
-            </a:r>
-            <a:r>
-              <a:rPr kumimoji="0" lang="en-US" altLang="en-US" sz="2000" b="0" i="0" u="none" strike="noStrike" cap="none" normalizeH="0" baseline="0" dirty="0" err="1">
-                <a:ln>
-                  <a:noFill/>
-                </a:ln>
-                <a:solidFill>
-                  <a:schemeClr val="tx1"/>
-                </a:solidFill>
-                <a:effectLst/>
-                <a:latin typeface="Arial" panose="020B0604020202020204" pitchFamily="34" charset="0"/>
-              </a:rPr>
-              <a:t>khuôn</a:t>
-            </a:r>
-            <a:r>
-              <a:rPr kumimoji="0" lang="en-US" altLang="en-US" sz="2000" b="0" i="0" u="none" strike="noStrike" cap="none" normalizeH="0" baseline="0" dirty="0">
-                <a:ln>
-                  <a:noFill/>
-                </a:ln>
-                <a:solidFill>
-                  <a:schemeClr val="tx1"/>
-                </a:solidFill>
-                <a:effectLst/>
-                <a:latin typeface="Arial" panose="020B0604020202020204" pitchFamily="34" charset="0"/>
-              </a:rPr>
-              <a:t> </a:t>
-            </a:r>
-            <a:r>
-              <a:rPr kumimoji="0" lang="en-US" altLang="en-US" sz="2000" b="0" i="0" u="none" strike="noStrike" cap="none" normalizeH="0" baseline="0" dirty="0" err="1">
-                <a:ln>
-                  <a:noFill/>
-                </a:ln>
-                <a:solidFill>
-                  <a:schemeClr val="tx1"/>
-                </a:solidFill>
-                <a:effectLst/>
-                <a:latin typeface="Arial" panose="020B0604020202020204" pitchFamily="34" charset="0"/>
-              </a:rPr>
-              <a:t>mặt</a:t>
             </a:r>
             <a:endParaRPr kumimoji="0" lang="en-US" altLang="en-US" sz="2000" b="0" i="0" u="none" strike="noStrike" cap="none" normalizeH="0" baseline="0" dirty="0">
               <a:ln>
@@ -20345,7 +19696,136 @@
               <a:buClrTx/>
               <a:buSzTx/>
               <a:buNone/>
-              <a:tabLst/>
+            </a:pPr>
+            <a:r>
+              <a:rPr kumimoji="0" lang="en-US" altLang="en-US" sz="2000" b="0" i="0" u="none" strike="noStrike" cap="none" normalizeH="0" baseline="0" dirty="0">
+                <a:ln>
+                  <a:noFill/>
+                </a:ln>
+                <a:solidFill>
+                  <a:schemeClr val="tx1"/>
+                </a:solidFill>
+                <a:effectLst/>
+                <a:latin typeface="Arial" panose="020B0604020202020204" pitchFamily="34" charset="0"/>
+              </a:rPr>
+              <a:t>-</a:t>
+            </a:r>
+            <a:r>
+              <a:rPr kumimoji="0" lang="en-US" altLang="en-US" sz="2000" b="0" i="0" u="none" strike="noStrike" cap="none" normalizeH="0" baseline="0" dirty="0" err="1">
+                <a:ln>
+                  <a:noFill/>
+                </a:ln>
+                <a:solidFill>
+                  <a:schemeClr val="tx1"/>
+                </a:solidFill>
+                <a:effectLst/>
+                <a:latin typeface="Arial" panose="020B0604020202020204" pitchFamily="34" charset="0"/>
+              </a:rPr>
+              <a:t>Nhận</a:t>
+            </a:r>
+            <a:r>
+              <a:rPr kumimoji="0" lang="en-US" altLang="en-US" sz="2000" b="0" i="0" u="none" strike="noStrike" cap="none" normalizeH="0" baseline="0" dirty="0">
+                <a:ln>
+                  <a:noFill/>
+                </a:ln>
+                <a:solidFill>
+                  <a:schemeClr val="tx1"/>
+                </a:solidFill>
+                <a:effectLst/>
+                <a:latin typeface="Arial" panose="020B0604020202020204" pitchFamily="34" charset="0"/>
+              </a:rPr>
+              <a:t> </a:t>
+            </a:r>
+            <a:r>
+              <a:rPr kumimoji="0" lang="en-US" altLang="en-US" sz="2000" b="0" i="0" u="none" strike="noStrike" cap="none" normalizeH="0" baseline="0" dirty="0" err="1">
+                <a:ln>
+                  <a:noFill/>
+                </a:ln>
+                <a:solidFill>
+                  <a:schemeClr val="tx1"/>
+                </a:solidFill>
+                <a:effectLst/>
+                <a:latin typeface="Arial" panose="020B0604020202020204" pitchFamily="34" charset="0"/>
+              </a:rPr>
+              <a:t>diện</a:t>
+            </a:r>
+            <a:r>
+              <a:rPr kumimoji="0" lang="en-US" altLang="en-US" sz="2000" b="0" i="0" u="none" strike="noStrike" cap="none" normalizeH="0" baseline="0" dirty="0">
+                <a:ln>
+                  <a:noFill/>
+                </a:ln>
+                <a:solidFill>
+                  <a:schemeClr val="tx1"/>
+                </a:solidFill>
+                <a:effectLst/>
+                <a:latin typeface="Arial" panose="020B0604020202020204" pitchFamily="34" charset="0"/>
+              </a:rPr>
+              <a:t> </a:t>
+            </a:r>
+            <a:r>
+              <a:rPr kumimoji="0" lang="en-US" altLang="en-US" sz="2000" b="0" i="0" u="none" strike="noStrike" cap="none" normalizeH="0" baseline="0" dirty="0" err="1">
+                <a:ln>
+                  <a:noFill/>
+                </a:ln>
+                <a:solidFill>
+                  <a:schemeClr val="tx1"/>
+                </a:solidFill>
+                <a:effectLst/>
+                <a:latin typeface="Arial" panose="020B0604020202020204" pitchFamily="34" charset="0"/>
+              </a:rPr>
+              <a:t>khuôn</a:t>
+            </a:r>
+            <a:r>
+              <a:rPr kumimoji="0" lang="en-US" altLang="en-US" sz="2000" b="0" i="0" u="none" strike="noStrike" cap="none" normalizeH="0" baseline="0" dirty="0">
+                <a:ln>
+                  <a:noFill/>
+                </a:ln>
+                <a:solidFill>
+                  <a:schemeClr val="tx1"/>
+                </a:solidFill>
+                <a:effectLst/>
+                <a:latin typeface="Arial" panose="020B0604020202020204" pitchFamily="34" charset="0"/>
+              </a:rPr>
+              <a:t> </a:t>
+            </a:r>
+            <a:r>
+              <a:rPr kumimoji="0" lang="en-US" altLang="en-US" sz="2000" b="0" i="0" u="none" strike="noStrike" cap="none" normalizeH="0" baseline="0" dirty="0" err="1">
+                <a:ln>
+                  <a:noFill/>
+                </a:ln>
+                <a:solidFill>
+                  <a:schemeClr val="tx1"/>
+                </a:solidFill>
+                <a:effectLst/>
+                <a:latin typeface="Arial" panose="020B0604020202020204" pitchFamily="34" charset="0"/>
+              </a:rPr>
+              <a:t>mặt</a:t>
+            </a:r>
+            <a:endParaRPr kumimoji="0" lang="en-US" altLang="en-US" sz="2000" b="0" i="0" u="none" strike="noStrike" cap="none" normalizeH="0" baseline="0" dirty="0">
+              <a:ln>
+                <a:noFill/>
+              </a:ln>
+              <a:solidFill>
+                <a:schemeClr val="tx1"/>
+              </a:solidFill>
+              <a:effectLst/>
+              <a:latin typeface="Arial" panose="020B0604020202020204" pitchFamily="34" charset="0"/>
+            </a:endParaRPr>
+          </a:p>
+          <a:p>
+            <a:pPr marL="0" marR="0" lvl="0" indent="0" algn="l" defTabSz="914400" rtl="0" eaLnBrk="0" fontAlgn="base" latinLnBrk="0" hangingPunct="0">
+              <a:lnSpc>
+                <a:spcPct val="100000"/>
+              </a:lnSpc>
+              <a:spcBef>
+                <a:spcPct val="0"/>
+              </a:spcBef>
+              <a:spcAft>
+                <a:spcPct val="0"/>
+              </a:spcAft>
+              <a:buClrTx/>
+              <a:buSzTx/>
+              <a:buNone/>
             </a:pPr>
             <a:r>
               <a:rPr kumimoji="0" lang="en-US" altLang="en-US" sz="2000" b="0" i="0" u="none" strike="noStrike" cap="none" normalizeH="0" baseline="0" dirty="0">
@@ -20503,7 +19983,6 @@
               <a:buSzTx/>
               <a:buFontTx/>
               <a:buNone/>
-              <a:tabLst/>
             </a:pPr>
             <a:endParaRPr kumimoji="0" lang="en-US" altLang="en-US" sz="1800" b="0" i="0" u="none" strike="noStrike" cap="none" normalizeH="0" baseline="0" dirty="0">
               <a:ln>
@@ -20519,11 +19998,6 @@
         </p:txBody>
       </p:sp>
     </p:spTree>
-    <p:extLst>
-      <p:ext uri="{BB962C8B-B14F-4D97-AF65-F5344CB8AC3E}">
-        <p14:creationId xmlns:p14="http://schemas.microsoft.com/office/powerpoint/2010/main" val="3198809308"/>
-      </p:ext>
-    </p:extLst>
   </p:cSld>
   <p:clrMapOvr>
     <a:masterClrMapping/>
@@ -20550,13 +20024,7 @@
       </p:grpSpPr>
       <p:sp>
         <p:nvSpPr>
-          <p:cNvPr id="2" name="Title 1">
-            <a:extLst>
-              <a:ext uri="{FF2B5EF4-FFF2-40B4-BE49-F238E27FC236}">
-                <a16:creationId xmlns:a16="http://schemas.microsoft.com/office/drawing/2014/main" id="{E1A54E6A-3322-DF71-91E2-FBEB6AE8D981}"/>
-              </a:ext>
-            </a:extLst>
-          </p:cNvPr>
+          <p:cNvPr id="2" name="Title 1"/>
           <p:cNvSpPr>
             <a:spLocks noGrp="1"/>
           </p:cNvSpPr>
@@ -20592,13 +20060,7 @@
       </p:sp>
       <p:pic>
         <p:nvPicPr>
-          <p:cNvPr id="5" name="Content Placeholder 4">
-            <a:extLst>
-              <a:ext uri="{FF2B5EF4-FFF2-40B4-BE49-F238E27FC236}">
-                <a16:creationId xmlns:a16="http://schemas.microsoft.com/office/drawing/2014/main" id="{3CC24E43-55A4-8679-9AE2-2AC02181ECD0}"/>
-              </a:ext>
-            </a:extLst>
-          </p:cNvPr>
+          <p:cNvPr id="5" name="Content Placeholder 4"/>
           <p:cNvPicPr>
             <a:picLocks noGrp="1" noChangeAspect="1"/>
           </p:cNvPicPr>
@@ -20607,7 +20069,7 @@
           </p:nvPr>
         </p:nvPicPr>
         <p:blipFill>
-          <a:blip r:embed="rId2">
+          <a:blip r:embed="rId1">
             <a:extLst>
               <a:ext uri="{28A0092B-C50C-407E-A947-70E740481C1C}">
                 <a14:useLocalDpi xmlns:a14="http://schemas.microsoft.com/office/drawing/2010/main" val="0"/>
@@ -20626,11 +20088,6 @@
         </p:spPr>
       </p:pic>
     </p:spTree>
-    <p:extLst>
-      <p:ext uri="{BB962C8B-B14F-4D97-AF65-F5344CB8AC3E}">
-        <p14:creationId xmlns:p14="http://schemas.microsoft.com/office/powerpoint/2010/main" val="349102763"/>
-      </p:ext>
-    </p:extLst>
   </p:cSld>
   <p:clrMapOvr>
     <a:masterClrMapping/>
@@ -20657,13 +20114,7 @@
       </p:grpSpPr>
       <p:sp>
         <p:nvSpPr>
-          <p:cNvPr id="2" name="Title 1">
-            <a:extLst>
-              <a:ext uri="{FF2B5EF4-FFF2-40B4-BE49-F238E27FC236}">
-                <a16:creationId xmlns:a16="http://schemas.microsoft.com/office/drawing/2014/main" id="{B147E661-FD48-0228-C459-59DFA7E9FFE3}"/>
-              </a:ext>
-            </a:extLst>
-          </p:cNvPr>
+          <p:cNvPr id="2" name="Title 1"/>
           <p:cNvSpPr>
             <a:spLocks noGrp="1"/>
           </p:cNvSpPr>
@@ -20701,13 +20152,7 @@
       </p:sp>
       <p:sp>
         <p:nvSpPr>
-          <p:cNvPr id="4" name="Rectangle 1">
-            <a:extLst>
-              <a:ext uri="{FF2B5EF4-FFF2-40B4-BE49-F238E27FC236}">
-                <a16:creationId xmlns:a16="http://schemas.microsoft.com/office/drawing/2014/main" id="{1924CBD6-73BB-8F84-8303-2AF4FCF62BF8}"/>
-              </a:ext>
-            </a:extLst>
-          </p:cNvPr>
+          <p:cNvPr id="4" name="Rectangle 1"/>
           <p:cNvSpPr>
             <a:spLocks noGrp="1" noChangeArrowheads="1"/>
           </p:cNvSpPr>
@@ -20759,9 +20204,6 @@
         </p:spPr>
         <p:txBody>
           <a:bodyPr vert="horz" wrap="square" lIns="91440" tIns="45720" rIns="91440" bIns="45720" numCol="1" anchor="ctr" anchorCtr="0" compatLnSpc="1">
-            <a:prstTxWarp prst="textNoShape">
-              <a:avLst/>
-            </a:prstTxWarp>
             <a:spAutoFit/>
           </a:bodyPr>
           <a:lstStyle/>
@@ -21280,6 +20722,10 @@
               </a:rPr>
               <a:t>.</a:t>
             </a:r>
+            <a:endParaRPr lang="en-US" sz="2000" dirty="0">
+              <a:latin typeface="Arial" panose="020B0604020202020204" pitchFamily="34" charset="0"/>
+              <a:cs typeface="Arial" panose="020B0604020202020204" pitchFamily="34" charset="0"/>
+            </a:endParaRPr>
           </a:p>
           <a:p>
             <a:pPr marL="0" indent="0" eaLnBrk="0" fontAlgn="base" hangingPunct="0">
@@ -22022,6 +21468,10 @@
               </a:rPr>
               <a:t>.</a:t>
             </a:r>
+            <a:endParaRPr lang="en-US" sz="2000" dirty="0">
+              <a:latin typeface="Arial" panose="020B0604020202020204" pitchFamily="34" charset="0"/>
+              <a:cs typeface="Arial" panose="020B0604020202020204" pitchFamily="34" charset="0"/>
+            </a:endParaRPr>
           </a:p>
           <a:p>
             <a:pPr marL="914400" lvl="2" indent="0" eaLnBrk="0" fontAlgn="base" hangingPunct="0">
@@ -22162,6 +21612,17 @@
               </a:rPr>
               <a:t>:</a:t>
             </a:r>
+            <a:endParaRPr kumimoji="0" lang="en-US" altLang="en-US" b="1" i="0" u="none" strike="noStrike" cap="none" normalizeH="0" baseline="0" dirty="0">
+              <a:ln>
+                <a:noFill/>
+              </a:ln>
+              <a:solidFill>
+                <a:schemeClr val="tx1"/>
+              </a:solidFill>
+              <a:effectLst/>
+              <a:latin typeface="Arial" panose="020B0604020202020204" pitchFamily="34" charset="0"/>
+              <a:cs typeface="Arial" panose="020B0604020202020204" pitchFamily="34" charset="0"/>
+            </a:endParaRPr>
           </a:p>
           <a:p>
             <a:pPr marL="914400" lvl="2" indent="0" eaLnBrk="0" fontAlgn="base" hangingPunct="0">
@@ -22586,7 +22047,6 @@
               <a:buSzTx/>
               <a:buFontTx/>
               <a:buNone/>
-              <a:tabLst/>
             </a:pPr>
             <a:endParaRPr kumimoji="0" lang="en-US" altLang="en-US" sz="1800" b="0" i="0" u="none" strike="noStrike" cap="none" normalizeH="0" baseline="0" dirty="0">
               <a:ln>
@@ -22603,20 +22063,14 @@
       </p:sp>
       <p:pic>
         <p:nvPicPr>
-          <p:cNvPr id="6" name="Picture 5">
-            <a:extLst>
-              <a:ext uri="{FF2B5EF4-FFF2-40B4-BE49-F238E27FC236}">
-                <a16:creationId xmlns:a16="http://schemas.microsoft.com/office/drawing/2014/main" id="{3635BF8E-74C8-B1F9-5A44-FB37D8C3707C}"/>
-              </a:ext>
-            </a:extLst>
-          </p:cNvPr>
+          <p:cNvPr id="6" name="Picture 5"/>
           <p:cNvPicPr>
             <a:picLocks noChangeAspect="1"/>
           </p:cNvPicPr>
           <p:nvPr/>
         </p:nvPicPr>
         <p:blipFill>
-          <a:blip r:embed="rId2">
+          <a:blip r:embed="rId1">
             <a:extLst>
               <a:ext uri="{28A0092B-C50C-407E-A947-70E740481C1C}">
                 <a14:useLocalDpi xmlns:a14="http://schemas.microsoft.com/office/drawing/2010/main" val="0"/>
@@ -22638,11 +22092,6 @@
         </p:spPr>
       </p:pic>
     </p:spTree>
-    <p:extLst>
-      <p:ext uri="{BB962C8B-B14F-4D97-AF65-F5344CB8AC3E}">
-        <p14:creationId xmlns:p14="http://schemas.microsoft.com/office/powerpoint/2010/main" val="940808575"/>
-      </p:ext>
-    </p:extLst>
   </p:cSld>
   <p:clrMapOvr>
     <a:masterClrMapping/>
@@ -22669,13 +22118,7 @@
       </p:grpSpPr>
       <p:sp>
         <p:nvSpPr>
-          <p:cNvPr id="2" name="Title 1">
-            <a:extLst>
-              <a:ext uri="{FF2B5EF4-FFF2-40B4-BE49-F238E27FC236}">
-                <a16:creationId xmlns:a16="http://schemas.microsoft.com/office/drawing/2014/main" id="{AB023526-73D1-8200-3606-F4C7A7156F6C}"/>
-              </a:ext>
-            </a:extLst>
-          </p:cNvPr>
+          <p:cNvPr id="2" name="Title 1"/>
           <p:cNvSpPr>
             <a:spLocks noGrp="1"/>
           </p:cNvSpPr>
@@ -22706,13 +22149,7 @@
       </p:sp>
       <p:sp>
         <p:nvSpPr>
-          <p:cNvPr id="4" name="Rectangle 1">
-            <a:extLst>
-              <a:ext uri="{FF2B5EF4-FFF2-40B4-BE49-F238E27FC236}">
-                <a16:creationId xmlns:a16="http://schemas.microsoft.com/office/drawing/2014/main" id="{DEEBB22B-B6D1-DA6C-EAEA-A24E8D028732}"/>
-              </a:ext>
-            </a:extLst>
-          </p:cNvPr>
+          <p:cNvPr id="4" name="Rectangle 1"/>
           <p:cNvSpPr>
             <a:spLocks noGrp="1" noChangeArrowheads="1"/>
           </p:cNvSpPr>
@@ -22764,9 +22201,6 @@
         </p:spPr>
         <p:txBody>
           <a:bodyPr vert="horz" wrap="square" lIns="91440" tIns="45720" rIns="91440" bIns="45720" numCol="1" anchor="ctr" anchorCtr="0" compatLnSpc="1">
-            <a:prstTxWarp prst="textNoShape">
-              <a:avLst/>
-            </a:prstTxWarp>
             <a:spAutoFit/>
           </a:bodyPr>
           <a:lstStyle/>
@@ -23593,6 +23027,10 @@
               </a:rPr>
               <a:t>. </a:t>
             </a:r>
+            <a:endParaRPr lang="en-US" sz="2000" dirty="0">
+              <a:latin typeface="Arial" panose="020B0604020202020204" pitchFamily="34" charset="0"/>
+              <a:cs typeface="Arial" panose="020B0604020202020204" pitchFamily="34" charset="0"/>
+            </a:endParaRPr>
           </a:p>
           <a:p>
             <a:pPr marL="0" indent="0">
@@ -23896,6 +23334,10 @@
               </a:rPr>
               <a:t>.</a:t>
             </a:r>
+            <a:endParaRPr lang="en-US" sz="2000" dirty="0">
+              <a:latin typeface="Arial" panose="020B0604020202020204" pitchFamily="34" charset="0"/>
+              <a:cs typeface="Arial" panose="020B0604020202020204" pitchFamily="34" charset="0"/>
+            </a:endParaRPr>
           </a:p>
           <a:p>
             <a:pPr marL="0" marR="0" lvl="0" indent="0" algn="l" defTabSz="914400" rtl="0" eaLnBrk="0" fontAlgn="base" latinLnBrk="0" hangingPunct="0">
@@ -23911,7 +23353,6 @@
               <a:buClrTx/>
               <a:buSzTx/>
               <a:buNone/>
-              <a:tabLst/>
             </a:pPr>
             <a:r>
               <a:rPr kumimoji="0" lang="en-US" altLang="en-US" sz="2000" b="0" i="0" u="none" strike="noStrike" cap="none" normalizeH="0" baseline="0" dirty="0">
@@ -23978,6 +23419,16 @@
               </a:rPr>
               <a:t>:</a:t>
             </a:r>
+            <a:endParaRPr kumimoji="0" lang="en-US" altLang="en-US" sz="2000" i="0" u="none" strike="noStrike" cap="none" normalizeH="0" baseline="0" dirty="0">
+              <a:ln>
+                <a:noFill/>
+              </a:ln>
+              <a:solidFill>
+                <a:schemeClr val="tx1"/>
+              </a:solidFill>
+              <a:effectLst/>
+              <a:latin typeface="Arial" panose="020B0604020202020204" pitchFamily="34" charset="0"/>
+            </a:endParaRPr>
           </a:p>
           <a:p>
             <a:pPr marL="0" marR="0" lvl="0" indent="0" algn="l" defTabSz="914400" rtl="0" eaLnBrk="0" fontAlgn="base" latinLnBrk="0" hangingPunct="0">
@@ -23993,7 +23444,6 @@
               <a:buClrTx/>
               <a:buSzTx/>
               <a:buNone/>
-              <a:tabLst/>
             </a:pPr>
             <a:r>
               <a:rPr kumimoji="0" lang="en-US" altLang="en-US" sz="2000" b="0" i="0" u="none" strike="noStrike" cap="none" normalizeH="0" baseline="0" dirty="0">
@@ -24124,7 +23574,6 @@
               <a:buClrTx/>
               <a:buSzTx/>
               <a:buNone/>
-              <a:tabLst/>
             </a:pPr>
             <a:r>
               <a:rPr kumimoji="0" lang="en-US" altLang="en-US" sz="2000" b="0" i="0" u="none" strike="noStrike" cap="none" normalizeH="0" baseline="0" dirty="0">
@@ -24255,7 +23704,6 @@
               <a:buClrTx/>
               <a:buSzTx/>
               <a:buNone/>
-              <a:tabLst/>
             </a:pPr>
             <a:r>
               <a:rPr kumimoji="0" lang="en-US" altLang="en-US" sz="2000" b="0" i="0" u="none" strike="noStrike" cap="none" normalizeH="0" baseline="0" dirty="0">
@@ -24361,7 +23809,6 @@
               <a:buSzTx/>
               <a:buFontTx/>
               <a:buNone/>
-              <a:tabLst/>
             </a:pPr>
             <a:endParaRPr kumimoji="0" lang="en-US" altLang="en-US" sz="1800" b="0" i="0" u="none" strike="noStrike" cap="none" normalizeH="0" baseline="0" dirty="0">
               <a:ln>
@@ -24378,20 +23825,14 @@
       </p:sp>
       <p:pic>
         <p:nvPicPr>
-          <p:cNvPr id="6" name="Picture 5">
-            <a:extLst>
-              <a:ext uri="{FF2B5EF4-FFF2-40B4-BE49-F238E27FC236}">
-                <a16:creationId xmlns:a16="http://schemas.microsoft.com/office/drawing/2014/main" id="{0A362546-EF8D-A125-D985-6BEE450C82D1}"/>
-              </a:ext>
-            </a:extLst>
-          </p:cNvPr>
+          <p:cNvPr id="6" name="Picture 5"/>
           <p:cNvPicPr>
             <a:picLocks noChangeAspect="1"/>
           </p:cNvPicPr>
           <p:nvPr/>
         </p:nvPicPr>
         <p:blipFill>
-          <a:blip r:embed="rId2">
+          <a:blip r:embed="rId1">
             <a:extLst>
               <a:ext uri="{28A0092B-C50C-407E-A947-70E740481C1C}">
                 <a14:useLocalDpi xmlns:a14="http://schemas.microsoft.com/office/drawing/2010/main" val="0"/>
@@ -24413,11 +23854,6 @@
         </p:spPr>
       </p:pic>
     </p:spTree>
-    <p:extLst>
-      <p:ext uri="{BB962C8B-B14F-4D97-AF65-F5344CB8AC3E}">
-        <p14:creationId xmlns:p14="http://schemas.microsoft.com/office/powerpoint/2010/main" val="2972806206"/>
-      </p:ext>
-    </p:extLst>
   </p:cSld>
   <p:clrMapOvr>
     <a:masterClrMapping/>
@@ -24444,13 +23880,7 @@
       </p:grpSpPr>
       <p:sp>
         <p:nvSpPr>
-          <p:cNvPr id="2" name="Title 1">
-            <a:extLst>
-              <a:ext uri="{FF2B5EF4-FFF2-40B4-BE49-F238E27FC236}">
-                <a16:creationId xmlns:a16="http://schemas.microsoft.com/office/drawing/2014/main" id="{8E385391-C64E-D035-6A63-28E1C15B0864}"/>
-              </a:ext>
-            </a:extLst>
-          </p:cNvPr>
+          <p:cNvPr id="2" name="Title 1"/>
           <p:cNvSpPr>
             <a:spLocks noGrp="1"/>
           </p:cNvSpPr>
@@ -24486,13 +23916,7 @@
       </p:sp>
       <p:sp>
         <p:nvSpPr>
-          <p:cNvPr id="4" name="Rectangle 1">
-            <a:extLst>
-              <a:ext uri="{FF2B5EF4-FFF2-40B4-BE49-F238E27FC236}">
-                <a16:creationId xmlns:a16="http://schemas.microsoft.com/office/drawing/2014/main" id="{32EA0E83-6AA4-A910-EE74-32F12F81AA40}"/>
-              </a:ext>
-            </a:extLst>
-          </p:cNvPr>
+          <p:cNvPr id="4" name="Rectangle 1"/>
           <p:cNvSpPr>
             <a:spLocks noGrp="1" noChangeArrowheads="1"/>
           </p:cNvSpPr>
@@ -24544,9 +23968,6 @@
         </p:spPr>
         <p:txBody>
           <a:bodyPr vert="horz" wrap="square" lIns="91440" tIns="45720" rIns="91440" bIns="45720" numCol="1" anchor="ctr" anchorCtr="0" compatLnSpc="1">
-            <a:prstTxWarp prst="textNoShape">
-              <a:avLst/>
-            </a:prstTxWarp>
             <a:spAutoFit/>
           </a:bodyPr>
           <a:lstStyle/>
@@ -24841,6 +24262,10 @@
               </a:rPr>
               <a:t>.</a:t>
             </a:r>
+            <a:endParaRPr lang="en-US" sz="2000" dirty="0">
+              <a:latin typeface="Arial" panose="020B0604020202020204" pitchFamily="34" charset="0"/>
+              <a:cs typeface="Arial" panose="020B0604020202020204" pitchFamily="34" charset="0"/>
+            </a:endParaRPr>
           </a:p>
           <a:p>
             <a:pPr marL="0" indent="0">
@@ -25399,6 +24824,10 @@
               </a:rPr>
               <a:t>.</a:t>
             </a:r>
+            <a:endParaRPr lang="en-US" sz="2000" dirty="0">
+              <a:latin typeface="Arial" panose="020B0604020202020204" pitchFamily="34" charset="0"/>
+              <a:cs typeface="Arial" panose="020B0604020202020204" pitchFamily="34" charset="0"/>
+            </a:endParaRPr>
           </a:p>
           <a:p>
             <a:pPr marL="0" indent="0">
@@ -25488,6 +24917,7 @@
               <a:rPr lang="en-US" sz="2000" dirty="0"/>
               <a:t>:</a:t>
             </a:r>
+            <a:endParaRPr lang="en-US" sz="2000" dirty="0"/>
           </a:p>
           <a:p>
             <a:pPr marL="914400" lvl="2" indent="0">
@@ -26040,7 +25470,6 @@
               <a:buClrTx/>
               <a:buSzTx/>
               <a:buNone/>
-              <a:tabLst/>
             </a:pPr>
             <a:r>
               <a:rPr kumimoji="0" lang="en-US" altLang="en-US" sz="2000" b="0" i="0" u="none" strike="noStrike" cap="none" normalizeH="0" baseline="0" dirty="0">
@@ -26106,101 +25535,6 @@
                 <a:latin typeface="Arial" panose="020B0604020202020204" pitchFamily="34" charset="0"/>
               </a:rPr>
               <a:t>:</a:t>
-            </a:r>
-          </a:p>
-          <a:p>
-            <a:pPr marL="0" marR="0" lvl="0" indent="0" algn="l" defTabSz="914400" rtl="0" eaLnBrk="0" fontAlgn="base" latinLnBrk="0" hangingPunct="0">
-              <a:lnSpc>
-                <a:spcPct val="100000"/>
-              </a:lnSpc>
-              <a:spcBef>
-                <a:spcPct val="0"/>
-              </a:spcBef>
-              <a:spcAft>
-                <a:spcPct val="0"/>
-              </a:spcAft>
-              <a:buClrTx/>
-              <a:buSzTx/>
-              <a:buNone/>
-              <a:tabLst/>
-            </a:pPr>
-            <a:r>
-              <a:rPr kumimoji="0" lang="en-US" altLang="en-US" sz="2000" b="0" i="0" u="none" strike="noStrike" cap="none" normalizeH="0" baseline="0" dirty="0">
-                <a:ln>
-                  <a:noFill/>
-                </a:ln>
-                <a:solidFill>
-                  <a:schemeClr val="tx1"/>
-                </a:solidFill>
-                <a:effectLst/>
-                <a:latin typeface="Arial" panose="020B0604020202020204" pitchFamily="34" charset="0"/>
-              </a:rPr>
-              <a:t>	-</a:t>
-            </a:r>
-            <a:r>
-              <a:rPr kumimoji="0" lang="en-US" altLang="en-US" sz="2000" b="0" i="0" u="none" strike="noStrike" cap="none" normalizeH="0" baseline="0" dirty="0" err="1">
-                <a:ln>
-                  <a:noFill/>
-                </a:ln>
-                <a:solidFill>
-                  <a:schemeClr val="tx1"/>
-                </a:solidFill>
-                <a:effectLst/>
-                <a:latin typeface="Arial" panose="020B0604020202020204" pitchFamily="34" charset="0"/>
-              </a:rPr>
-              <a:t>Dễ</a:t>
-            </a:r>
-            <a:r>
-              <a:rPr kumimoji="0" lang="en-US" altLang="en-US" sz="2000" b="0" i="0" u="none" strike="noStrike" cap="none" normalizeH="0" baseline="0" dirty="0">
-                <a:ln>
-                  <a:noFill/>
-                </a:ln>
-                <a:solidFill>
-                  <a:schemeClr val="tx1"/>
-                </a:solidFill>
-                <a:effectLst/>
-                <a:latin typeface="Arial" panose="020B0604020202020204" pitchFamily="34" charset="0"/>
-              </a:rPr>
-              <a:t> </a:t>
-            </a:r>
-            <a:r>
-              <a:rPr kumimoji="0" lang="en-US" altLang="en-US" sz="2000" b="0" i="0" u="none" strike="noStrike" cap="none" normalizeH="0" baseline="0" dirty="0" err="1">
-                <a:ln>
-                  <a:noFill/>
-                </a:ln>
-                <a:solidFill>
-                  <a:schemeClr val="tx1"/>
-                </a:solidFill>
-                <a:effectLst/>
-                <a:latin typeface="Arial" panose="020B0604020202020204" pitchFamily="34" charset="0"/>
-              </a:rPr>
-              <a:t>triển</a:t>
-            </a:r>
-            <a:r>
-              <a:rPr kumimoji="0" lang="en-US" altLang="en-US" sz="2000" b="0" i="0" u="none" strike="noStrike" cap="none" normalizeH="0" baseline="0" dirty="0">
-                <a:ln>
-                  <a:noFill/>
-                </a:ln>
-                <a:solidFill>
-                  <a:schemeClr val="tx1"/>
-                </a:solidFill>
-                <a:effectLst/>
-                <a:latin typeface="Arial" panose="020B0604020202020204" pitchFamily="34" charset="0"/>
-              </a:rPr>
-              <a:t> </a:t>
-            </a:r>
-            <a:r>
-              <a:rPr kumimoji="0" lang="en-US" altLang="en-US" sz="2000" b="0" i="0" u="none" strike="noStrike" cap="none" normalizeH="0" baseline="0" dirty="0" err="1">
-                <a:ln>
-                  <a:noFill/>
-                </a:ln>
-                <a:solidFill>
-                  <a:schemeClr val="tx1"/>
-                </a:solidFill>
-                <a:effectLst/>
-                <a:latin typeface="Arial" panose="020B0604020202020204" pitchFamily="34" charset="0"/>
-              </a:rPr>
-              <a:t>khai</a:t>
             </a:r>
             <a:endParaRPr kumimoji="0" lang="en-US" altLang="en-US" sz="2000" b="0" i="0" u="none" strike="noStrike" cap="none" normalizeH="0" baseline="0" dirty="0">
               <a:ln>
@@ -26227,7 +25561,110 @@
               <a:buClrTx/>
               <a:buSzTx/>
               <a:buNone/>
-              <a:tabLst/>
+            </a:pPr>
+            <a:r>
+              <a:rPr kumimoji="0" lang="en-US" altLang="en-US" sz="2000" b="0" i="0" u="none" strike="noStrike" cap="none" normalizeH="0" baseline="0" dirty="0">
+                <a:ln>
+                  <a:noFill/>
+                </a:ln>
+                <a:solidFill>
+                  <a:schemeClr val="tx1"/>
+                </a:solidFill>
+                <a:effectLst/>
+                <a:latin typeface="Arial" panose="020B0604020202020204" pitchFamily="34" charset="0"/>
+              </a:rPr>
+              <a:t>	-</a:t>
+            </a:r>
+            <a:r>
+              <a:rPr kumimoji="0" lang="en-US" altLang="en-US" sz="2000" b="0" i="0" u="none" strike="noStrike" cap="none" normalizeH="0" baseline="0" dirty="0" err="1">
+                <a:ln>
+                  <a:noFill/>
+                </a:ln>
+                <a:solidFill>
+                  <a:schemeClr val="tx1"/>
+                </a:solidFill>
+                <a:effectLst/>
+                <a:latin typeface="Arial" panose="020B0604020202020204" pitchFamily="34" charset="0"/>
+              </a:rPr>
+              <a:t>Dễ</a:t>
+            </a:r>
+            <a:r>
+              <a:rPr kumimoji="0" lang="en-US" altLang="en-US" sz="2000" b="0" i="0" u="none" strike="noStrike" cap="none" normalizeH="0" baseline="0" dirty="0">
+                <a:ln>
+                  <a:noFill/>
+                </a:ln>
+                <a:solidFill>
+                  <a:schemeClr val="tx1"/>
+                </a:solidFill>
+                <a:effectLst/>
+                <a:latin typeface="Arial" panose="020B0604020202020204" pitchFamily="34" charset="0"/>
+              </a:rPr>
+              <a:t> </a:t>
+            </a:r>
+            <a:r>
+              <a:rPr kumimoji="0" lang="en-US" altLang="en-US" sz="2000" b="0" i="0" u="none" strike="noStrike" cap="none" normalizeH="0" baseline="0" dirty="0" err="1">
+                <a:ln>
+                  <a:noFill/>
+                </a:ln>
+                <a:solidFill>
+                  <a:schemeClr val="tx1"/>
+                </a:solidFill>
+                <a:effectLst/>
+                <a:latin typeface="Arial" panose="020B0604020202020204" pitchFamily="34" charset="0"/>
+              </a:rPr>
+              <a:t>triển</a:t>
+            </a:r>
+            <a:r>
+              <a:rPr kumimoji="0" lang="en-US" altLang="en-US" sz="2000" b="0" i="0" u="none" strike="noStrike" cap="none" normalizeH="0" baseline="0" dirty="0">
+                <a:ln>
+                  <a:noFill/>
+                </a:ln>
+                <a:solidFill>
+                  <a:schemeClr val="tx1"/>
+                </a:solidFill>
+                <a:effectLst/>
+                <a:latin typeface="Arial" panose="020B0604020202020204" pitchFamily="34" charset="0"/>
+              </a:rPr>
+              <a:t> </a:t>
+            </a:r>
+            <a:r>
+              <a:rPr kumimoji="0" lang="en-US" altLang="en-US" sz="2000" b="0" i="0" u="none" strike="noStrike" cap="none" normalizeH="0" baseline="0" dirty="0" err="1">
+                <a:ln>
+                  <a:noFill/>
+                </a:ln>
+                <a:solidFill>
+                  <a:schemeClr val="tx1"/>
+                </a:solidFill>
+                <a:effectLst/>
+                <a:latin typeface="Arial" panose="020B0604020202020204" pitchFamily="34" charset="0"/>
+              </a:rPr>
+              <a:t>khai</a:t>
+            </a:r>
+            <a:endParaRPr kumimoji="0" lang="en-US" altLang="en-US" sz="2000" b="0" i="0" u="none" strike="noStrike" cap="none" normalizeH="0" baseline="0" dirty="0">
+              <a:ln>
+                <a:noFill/>
+              </a:ln>
+              <a:solidFill>
+                <a:schemeClr val="tx1"/>
+              </a:solidFill>
+              <a:effectLst/>
+              <a:latin typeface="Arial" panose="020B0604020202020204" pitchFamily="34" charset="0"/>
+            </a:endParaRPr>
+          </a:p>
+          <a:p>
+            <a:pPr marL="0" marR="0" lvl="0" indent="0" algn="l" defTabSz="914400" rtl="0" eaLnBrk="0" fontAlgn="base" latinLnBrk="0" hangingPunct="0">
+              <a:lnSpc>
+                <a:spcPct val="100000"/>
+              </a:lnSpc>
+              <a:spcBef>
+                <a:spcPct val="0"/>
+              </a:spcBef>
+              <a:spcAft>
+                <a:spcPct val="0"/>
+              </a:spcAft>
+              <a:buClrTx/>
+              <a:buSzTx/>
+              <a:buNone/>
             </a:pPr>
             <a:r>
               <a:rPr kumimoji="0" lang="en-US" altLang="en-US" sz="2000" b="0" i="0" u="none" strike="noStrike" cap="none" normalizeH="0" baseline="0" dirty="0">
@@ -26385,7 +25822,6 @@
               <a:buSzTx/>
               <a:buFontTx/>
               <a:buNone/>
-              <a:tabLst/>
             </a:pPr>
             <a:endParaRPr kumimoji="0" lang="en-US" altLang="en-US" sz="1800" b="0" i="0" u="none" strike="noStrike" cap="none" normalizeH="0" baseline="0" dirty="0">
               <a:ln>
@@ -26402,20 +25838,14 @@
       </p:sp>
       <p:pic>
         <p:nvPicPr>
-          <p:cNvPr id="6" name="Picture 5">
-            <a:extLst>
-              <a:ext uri="{FF2B5EF4-FFF2-40B4-BE49-F238E27FC236}">
-                <a16:creationId xmlns:a16="http://schemas.microsoft.com/office/drawing/2014/main" id="{02E28D0A-D3BC-34BF-6838-835A8B4EF261}"/>
-              </a:ext>
-            </a:extLst>
-          </p:cNvPr>
+          <p:cNvPr id="6" name="Picture 5"/>
           <p:cNvPicPr>
             <a:picLocks noChangeAspect="1"/>
           </p:cNvPicPr>
           <p:nvPr/>
         </p:nvPicPr>
         <p:blipFill>
-          <a:blip r:embed="rId2">
+          <a:blip r:embed="rId1">
             <a:extLst>
               <a:ext uri="{28A0092B-C50C-407E-A947-70E740481C1C}">
                 <a14:useLocalDpi xmlns:a14="http://schemas.microsoft.com/office/drawing/2010/main" val="0"/>
@@ -26437,11 +25867,6 @@
         </p:spPr>
       </p:pic>
     </p:spTree>
-    <p:extLst>
-      <p:ext uri="{BB962C8B-B14F-4D97-AF65-F5344CB8AC3E}">
-        <p14:creationId xmlns:p14="http://schemas.microsoft.com/office/powerpoint/2010/main" val="3525630926"/>
-      </p:ext>
-    </p:extLst>
   </p:cSld>
   <p:clrMapOvr>
     <a:masterClrMapping/>
@@ -26468,13 +25893,7 @@
       </p:grpSpPr>
       <p:sp>
         <p:nvSpPr>
-          <p:cNvPr id="2" name="Title 1">
-            <a:extLst>
-              <a:ext uri="{FF2B5EF4-FFF2-40B4-BE49-F238E27FC236}">
-                <a16:creationId xmlns:a16="http://schemas.microsoft.com/office/drawing/2014/main" id="{502945A1-98B9-EA4C-5AF3-5CD08092B6A6}"/>
-              </a:ext>
-            </a:extLst>
-          </p:cNvPr>
+          <p:cNvPr id="2" name="Title 1"/>
           <p:cNvSpPr>
             <a:spLocks noGrp="1"/>
           </p:cNvSpPr>
@@ -26508,13 +25927,7 @@
       </p:sp>
       <p:pic>
         <p:nvPicPr>
-          <p:cNvPr id="5" name="Content Placeholder 4">
-            <a:extLst>
-              <a:ext uri="{FF2B5EF4-FFF2-40B4-BE49-F238E27FC236}">
-                <a16:creationId xmlns:a16="http://schemas.microsoft.com/office/drawing/2014/main" id="{55E34281-CBCF-8148-228B-E35482CBF0DF}"/>
-              </a:ext>
-            </a:extLst>
-          </p:cNvPr>
+          <p:cNvPr id="5" name="Content Placeholder 4"/>
           <p:cNvPicPr>
             <a:picLocks noGrp="1" noChangeAspect="1"/>
           </p:cNvPicPr>
@@ -26523,7 +25936,7 @@
           </p:nvPr>
         </p:nvPicPr>
         <p:blipFill>
-          <a:blip r:embed="rId2">
+          <a:blip r:embed="rId1">
             <a:extLst>
               <a:ext uri="{28A0092B-C50C-407E-A947-70E740481C1C}">
                 <a14:useLocalDpi xmlns:a14="http://schemas.microsoft.com/office/drawing/2010/main" val="0"/>
@@ -26542,11 +25955,6 @@
         </p:spPr>
       </p:pic>
     </p:spTree>
-    <p:extLst>
-      <p:ext uri="{BB962C8B-B14F-4D97-AF65-F5344CB8AC3E}">
-        <p14:creationId xmlns:p14="http://schemas.microsoft.com/office/powerpoint/2010/main" val="3391291143"/>
-      </p:ext>
-    </p:extLst>
   </p:cSld>
   <p:clrMapOvr>
     <a:masterClrMapping/>
@@ -26597,7 +26005,7 @@
     </a:clrScheme>
     <a:fontScheme name="Office">
       <a:majorFont>
-        <a:latin typeface="Aptos Display" panose="02110004020202020204"/>
+        <a:latin typeface="Aptos Display"/>
         <a:ea typeface=""/>
         <a:cs typeface=""/>
         <a:font script="Jpan" typeface="游ゴシック Light"/>
@@ -26630,26 +26038,9 @@
         <a:font script="Viet" typeface="Times New Roman"/>
         <a:font script="Uigh" typeface="Microsoft Uighur"/>
         <a:font script="Geor" typeface="Sylfaen"/>
-        <a:font script="Armn" typeface="Arial"/>
-        <a:font script="Bugi" typeface="Leelawadee UI"/>
-        <a:font script="Bopo" typeface="Microsoft JhengHei"/>
-        <a:font script="Java" typeface="Javanese Text"/>
-        <a:font script="Lisu" typeface="Segoe UI"/>
-        <a:font script="Mymr" typeface="Myanmar Text"/>
-        <a:font script="Nkoo" typeface="Ebrima"/>
-        <a:font script="Olck" typeface="Nirmala UI"/>
-        <a:font script="Osma" typeface="Ebrima"/>
-        <a:font script="Phag" typeface="Phagspa"/>
-        <a:font script="Syrn" typeface="Estrangelo Edessa"/>
-        <a:font script="Syrj" typeface="Estrangelo Edessa"/>
-        <a:font script="Syre" typeface="Estrangelo Edessa"/>
-        <a:font script="Sora" typeface="Nirmala UI"/>
-        <a:font script="Tale" typeface="Microsoft Tai Le"/>
-        <a:font script="Talu" typeface="Microsoft New Tai Lue"/>
-        <a:font script="Tfng" typeface="Ebrima"/>
       </a:majorFont>
       <a:minorFont>
-        <a:latin typeface="Aptos" panose="02110004020202020204"/>
+        <a:latin typeface="Aptos"/>
         <a:ea typeface=""/>
         <a:cs typeface=""/>
         <a:font script="Jpan" typeface="游ゴシック"/>
@@ -26682,23 +26073,6 @@
         <a:font script="Viet" typeface="Arial"/>
         <a:font script="Uigh" typeface="Microsoft Uighur"/>
         <a:font script="Geor" typeface="Sylfaen"/>
-        <a:font script="Armn" typeface="Arial"/>
-        <a:font script="Bugi" typeface="Leelawadee UI"/>
-        <a:font script="Bopo" typeface="Microsoft JhengHei"/>
-        <a:font script="Java" typeface="Javanese Text"/>
-        <a:font script="Lisu" typeface="Segoe UI"/>
-        <a:font script="Mymr" typeface="Myanmar Text"/>
-        <a:font script="Nkoo" typeface="Ebrima"/>
-        <a:font script="Olck" typeface="Nirmala UI"/>
-        <a:font script="Osma" typeface="Ebrima"/>
-        <a:font script="Phag" typeface="Phagspa"/>
-        <a:font script="Syrn" typeface="Estrangelo Edessa"/>
-        <a:font script="Syrj" typeface="Estrangelo Edessa"/>
-        <a:font script="Syre" typeface="Estrangelo Edessa"/>
-        <a:font script="Sora" typeface="Nirmala UI"/>
-        <a:font script="Tale" typeface="Microsoft Tai Le"/>
-        <a:font script="Talu" typeface="Microsoft New Tai Lue"/>
-        <a:font script="Tfng" typeface="Ebrima"/>
       </a:minorFont>
     </a:fontScheme>
     <a:fmtScheme name="Office">
@@ -26860,10 +26234,9 @@
       </a:style>
     </a:lnDef>
   </a:objectDefaults>
-  <a:extraClrSchemeLst/>
   <a:extLst>
     <a:ext uri="{05A4C25C-085E-4340-85A3-A5531E510DB2}">
-      <thm15:themeFamily xmlns:thm15="http://schemas.microsoft.com/office/thememl/2012/main" name="Office Theme" id="{2E142A2C-CD16-42D6-873A-C26D2A0506FA}" vid="{1BDDFF52-6CD6-40A5-AB3C-68EB2F1E4D0A}"/>
+      <thm15:themeFamily xmlns:thm15="http://schemas.microsoft.com/office/thememl/2012/main" name="Office Theme" id="{62F939B6-93AF-4DB8-9C6B-D6C7DFDC589F}" vid="{4A3C46E8-61CC-4603-A589-7422A47A8E4A}"/>
     </a:ext>
   </a:extLst>
 </a:theme>
